--- a/project_31_flood_risk/presentations/project_presentation.pptx
+++ b/project_31_flood_risk/presentations/project_presentation.pptx
@@ -13,6 +13,13 @@
     <p:sldId id="261" r:id="rId12"/>
     <p:sldId id="262" r:id="rId13"/>
     <p:sldId id="263" r:id="rId14"/>
+    <p:sldId id="264" r:id="rId15"/>
+    <p:sldId id="265" r:id="rId16"/>
+    <p:sldId id="266" r:id="rId17"/>
+    <p:sldId id="267" r:id="rId18"/>
+    <p:sldId id="268" r:id="rId19"/>
+    <p:sldId id="269" r:id="rId20"/>
+    <p:sldId id="270" r:id="rId21"/>
   </p:sldIdLst>
   <p:sldSz cx="12191695" cy="6858000" type="screen4x3"/>
   <p:notesSz cx="6858000" cy="9144000"/>
@@ -3110,7 +3117,7 @@
             <a:avLst/>
           </a:prstGeom>
           <a:solidFill>
-            <a:srgbClr val="0F172A"/>
+            <a:srgbClr val="06111E"/>
           </a:solidFill>
           <a:ln>
             <a:noFill/>
@@ -3146,8 +3153,8 @@
         </p:nvSpPr>
         <p:spPr>
           <a:xfrm>
-            <a:off x="1097280" y="1645920"/>
-            <a:ext cx="10058400" cy="3474720"/>
+            <a:off x="914400" y="1645920"/>
+            <a:ext cx="10332720" cy="3474720"/>
           </a:xfrm>
           <a:prstGeom prst="rect">
             <a:avLst/>
@@ -3163,42 +3170,1997 @@
             <a:pPr>
               <a:defRPr sz="1400" b="1">
                 <a:solidFill>
-                  <a:srgbClr val="38BDF8"/>
-                </a:solidFill>
-              </a:defRPr>
-            </a:pPr>
-            <a:r>
-              <a:t>PROJECT 31 OF 55  •  RESEARCH &amp; IMPLEMENTATION DECK</a:t>
-            </a:r>
-          </a:p>
-          <a:p>
-            <a:pPr>
-              <a:spcBef>
-                <a:spcPts val="1400"/>
-              </a:spcBef>
-              <a:defRPr sz="3200" b="1">
-                <a:solidFill>
-                  <a:srgbClr val="FFFFFF"/>
-                </a:solidFill>
-              </a:defRPr>
-            </a:pPr>
-            <a:r>
-              <a:t>FLOOD RISK PREDICTION AND REAL-TIME EARLY WARNING SYSTEM USING MACHINE LEARNING AND GEOSPATIAL DATA</a:t>
-            </a:r>
-          </a:p>
-          <a:p>
-            <a:pPr>
-              <a:spcBef>
-                <a:spcPts val="1200"/>
-              </a:spcBef>
+                  <a:srgbClr val="06B6D4"/>
+                </a:solidFill>
+              </a:defRPr>
+            </a:pPr>
+            <a:r>
+              <a:t>PROJECT-031 CAPSTONE DEFENSE</a:t>
+            </a:r>
+          </a:p>
+          <a:p>
+            <a:pPr>
+              <a:defRPr sz="3600" b="1">
+                <a:solidFill>
+                  <a:srgbClr val="F8FAFC"/>
+                </a:solidFill>
+              </a:defRPr>
+            </a:pPr>
+            <a:r>
+              <a:t>Urban Flood Risk Prediction &amp;</a:t>
+            </a:r>
+            <a:br/>
+            <a:r>
+              <a:t>Early Warning System</a:t>
+            </a:r>
+          </a:p>
+          <a:p>
+            <a:pPr>
               <a:defRPr sz="1600">
                 <a:solidFill>
-                  <a:srgbClr val="CBD5E1"/>
-                </a:solidFill>
-              </a:defRPr>
-            </a:pPr>
-            <a:r>
-              <a:t>Enterprise-Grade AI Architecture, Machine Learning Pipeline &amp; Deployment Framework</a:t>
+                  <a:srgbClr val="3B82F6"/>
+                </a:solidFill>
+              </a:defRPr>
+            </a:pPr>
+            <a:r>
+              <a:t>Deep Neural Hydrological Modeling, Topographic Flow Routing &amp; Early Evacuation Telematics</a:t>
+            </a:r>
+          </a:p>
+          <a:p>
+            <a:br/>
+            <a:pPr>
+              <a:defRPr sz="1200">
+                <a:solidFill>
+                  <a:srgbClr val="94A3B8"/>
+                </a:solidFill>
+              </a:defRPr>
+            </a:pPr>
+            <a:r>
+              <a:t>Dual PyTorch Models • 5,800 Telemetry Records • SQLite WAL Persistence • 31 Passing QA Tests</a:t>
+            </a:r>
+          </a:p>
+        </p:txBody>
+      </p:sp>
+    </p:spTree>
+  </p:cSld>
+  <p:clrMapOvr>
+    <a:masterClrMapping/>
+  </p:clrMapOvr>
+</p:sld>
+</file>
+
+<file path=ppt/slides/slide10.xml><?xml version="1.0" encoding="utf-8"?>
+<p:sld xmlns:a="http://schemas.openxmlformats.org/drawingml/2006/main" xmlns:p="http://schemas.openxmlformats.org/presentationml/2006/main" xmlns:r="http://schemas.openxmlformats.org/officeDocument/2006/relationships">
+  <p:cSld>
+    <p:spTree>
+      <p:nvGrpSpPr>
+        <p:cNvPr id="1" name=""/>
+        <p:cNvGrpSpPr/>
+        <p:nvPr/>
+      </p:nvGrpSpPr>
+      <p:grpSpPr/>
+      <p:sp>
+        <p:nvSpPr>
+          <p:cNvPr id="2" name="Rectangle 1"/>
+          <p:cNvSpPr/>
+          <p:nvPr/>
+        </p:nvSpPr>
+        <p:spPr>
+          <a:xfrm>
+            <a:off x="0" y="0"/>
+            <a:ext cx="12191695" cy="6858000"/>
+          </a:xfrm>
+          <a:prstGeom prst="rect">
+            <a:avLst/>
+          </a:prstGeom>
+          <a:solidFill>
+            <a:srgbClr val="06111E"/>
+          </a:solidFill>
+          <a:ln>
+            <a:noFill/>
+          </a:ln>
+        </p:spPr>
+        <p:style>
+          <a:lnRef idx="1">
+            <a:schemeClr val="accent1"/>
+          </a:lnRef>
+          <a:fillRef idx="3">
+            <a:schemeClr val="accent1"/>
+          </a:fillRef>
+          <a:effectRef idx="2">
+            <a:schemeClr val="accent1"/>
+          </a:effectRef>
+          <a:fontRef idx="minor">
+            <a:schemeClr val="lt1"/>
+          </a:fontRef>
+        </p:style>
+        <p:txBody>
+          <a:bodyPr rtlCol="0" anchor="ctr"/>
+          <a:lstStyle/>
+          <a:p>
+            <a:pPr algn="ctr"/>
+          </a:p>
+        </p:txBody>
+      </p:sp>
+      <p:sp>
+        <p:nvSpPr>
+          <p:cNvPr id="3" name="TextBox 2"/>
+          <p:cNvSpPr txBox="1"/>
+          <p:nvPr/>
+        </p:nvSpPr>
+        <p:spPr>
+          <a:xfrm>
+            <a:off x="731520" y="365760"/>
+            <a:ext cx="10698480" cy="1005840"/>
+          </a:xfrm>
+          <a:prstGeom prst="rect">
+            <a:avLst/>
+          </a:prstGeom>
+          <a:noFill/>
+        </p:spPr>
+        <p:txBody>
+          <a:bodyPr wrap="square" lIns="0" tIns="0" rIns="0" bIns="0">
+            <a:spAutoFit/>
+          </a:bodyPr>
+          <a:lstStyle/>
+          <a:p>
+            <a:pPr>
+              <a:defRPr sz="1000" b="1">
+                <a:solidFill>
+                  <a:srgbClr val="06B6D4"/>
+                </a:solidFill>
+              </a:defRPr>
+            </a:pPr>
+            <a:r>
+              <a:t>PROJECT 31 • HYDROLOGY &amp; GEOSPATIAL INTELLIGENCE</a:t>
+            </a:r>
+          </a:p>
+          <a:p>
+            <a:pPr>
+              <a:defRPr sz="2200" b="1">
+                <a:solidFill>
+                  <a:srgbClr val="F8FAFC"/>
+                </a:solidFill>
+              </a:defRPr>
+            </a:pPr>
+            <a:r>
+              <a:t>Simulated Deluge: Coastal Estuary Critical Red Alert</a:t>
+            </a:r>
+          </a:p>
+        </p:txBody>
+      </p:sp>
+      <p:pic>
+        <p:nvPicPr>
+          <p:cNvPr id="4" name="Picture 3" descr="05_critical_flood_alert.png"/>
+          <p:cNvPicPr>
+            <a:picLocks noChangeAspect="1"/>
+          </p:cNvPicPr>
+          <p:nvPr/>
+        </p:nvPicPr>
+        <p:blipFill>
+          <a:blip r:embed="rId2"/>
+          <a:stretch>
+            <a:fillRect/>
+          </a:stretch>
+        </p:blipFill>
+        <p:spPr>
+          <a:xfrm>
+            <a:off x="731520" y="1645920"/>
+            <a:ext cx="6858000" cy="4572000"/>
+          </a:xfrm>
+          <a:prstGeom prst="rect">
+            <a:avLst/>
+          </a:prstGeom>
+        </p:spPr>
+      </p:pic>
+      <p:sp>
+        <p:nvSpPr>
+          <p:cNvPr id="5" name="Rounded Rectangle 4"/>
+          <p:cNvSpPr/>
+          <p:nvPr/>
+        </p:nvSpPr>
+        <p:spPr>
+          <a:xfrm>
+            <a:off x="7863840" y="1645920"/>
+            <a:ext cx="3566160" cy="4572000"/>
+          </a:xfrm>
+          <a:prstGeom prst="roundRect">
+            <a:avLst/>
+          </a:prstGeom>
+          <a:solidFill>
+            <a:srgbClr val="0C1A2E"/>
+          </a:solidFill>
+          <a:ln w="9525">
+            <a:solidFill>
+              <a:srgbClr val="FFFFFF"/>
+            </a:solidFill>
+          </a:ln>
+        </p:spPr>
+        <p:style>
+          <a:lnRef idx="1">
+            <a:schemeClr val="accent1"/>
+          </a:lnRef>
+          <a:fillRef idx="3">
+            <a:schemeClr val="accent1"/>
+          </a:fillRef>
+          <a:effectRef idx="2">
+            <a:schemeClr val="accent1"/>
+          </a:effectRef>
+          <a:fontRef idx="minor">
+            <a:schemeClr val="lt1"/>
+          </a:fontRef>
+        </p:style>
+        <p:txBody>
+          <a:bodyPr rtlCol="0" anchor="ctr"/>
+          <a:lstStyle/>
+          <a:p>
+            <a:pPr algn="ctr"/>
+          </a:p>
+        </p:txBody>
+      </p:sp>
+      <p:sp>
+        <p:nvSpPr>
+          <p:cNvPr id="6" name="TextBox 5"/>
+          <p:cNvSpPr txBox="1"/>
+          <p:nvPr/>
+        </p:nvSpPr>
+        <p:spPr>
+          <a:xfrm>
+            <a:off x="8092440" y="1828800"/>
+            <a:ext cx="3108960" cy="4206240"/>
+          </a:xfrm>
+          <a:prstGeom prst="rect">
+            <a:avLst/>
+          </a:prstGeom>
+          <a:noFill/>
+        </p:spPr>
+        <p:txBody>
+          <a:bodyPr wrap="square" lIns="0" tIns="0" rIns="0" bIns="0">
+            <a:spAutoFit/>
+          </a:bodyPr>
+          <a:lstStyle/>
+          <a:p>
+            <a:pPr>
+              <a:defRPr sz="1400" b="1">
+                <a:solidFill>
+                  <a:srgbClr val="06B6D4"/>
+                </a:solidFill>
+              </a:defRPr>
+            </a:pPr>
+            <a:r>
+              <a:t>Red Alert Telematics</a:t>
+            </a:r>
+          </a:p>
+          <a:p>
+            <a:pPr>
+              <a:defRPr sz="1100">
+                <a:solidFill>
+                  <a:srgbClr val="94A3B8"/>
+                </a:solidFill>
+              </a:defRPr>
+            </a:pPr>
+            <a:r>
+              <a:t>• Triggered by 220mm rainfall and 2.2m storm surge in 3.2m DEM zone.</a:t>
+            </a:r>
+          </a:p>
+          <a:p>
+            <a:pPr>
+              <a:defRPr sz="1100">
+                <a:solidFill>
+                  <a:srgbClr val="94A3B8"/>
+                </a:solidFill>
+              </a:defRPr>
+            </a:pPr>
+            <a:r>
+              <a:t>• Alert: 'RED ALERT: Severe Inundation Imminent' (Risk: 86.0%).</a:t>
+            </a:r>
+          </a:p>
+          <a:p>
+            <a:pPr>
+              <a:defRPr sz="1100">
+                <a:solidFill>
+                  <a:srgbClr val="94A3B8"/>
+                </a:solidFill>
+              </a:defRPr>
+            </a:pPr>
+            <a:r>
+              <a:t>• Predicted Inundation Depth: 1.45m - 2.78m standing water.</a:t>
+            </a:r>
+          </a:p>
+          <a:p>
+            <a:pPr>
+              <a:defRPr sz="1100">
+                <a:solidFill>
+                  <a:srgbClr val="94A3B8"/>
+                </a:solidFill>
+              </a:defRPr>
+            </a:pPr>
+            <a:r>
+              <a:t>• Evacuation Lead Time: 2.5 hours.</a:t>
+            </a:r>
+          </a:p>
+          <a:p>
+            <a:pPr>
+              <a:defRPr sz="1100">
+                <a:solidFill>
+                  <a:srgbClr val="94A3B8"/>
+                </a:solidFill>
+              </a:defRPr>
+            </a:pPr>
+            <a:r>
+              <a:t>• Action Protocol: Mandatory ground-floor evacuation and flood barrier deployment.</a:t>
+            </a:r>
+          </a:p>
+        </p:txBody>
+      </p:sp>
+    </p:spTree>
+  </p:cSld>
+  <p:clrMapOvr>
+    <a:masterClrMapping/>
+  </p:clrMapOvr>
+</p:sld>
+</file>
+
+<file path=ppt/slides/slide11.xml><?xml version="1.0" encoding="utf-8"?>
+<p:sld xmlns:a="http://schemas.openxmlformats.org/drawingml/2006/main" xmlns:p="http://schemas.openxmlformats.org/presentationml/2006/main" xmlns:r="http://schemas.openxmlformats.org/officeDocument/2006/relationships">
+  <p:cSld>
+    <p:spTree>
+      <p:nvGrpSpPr>
+        <p:cNvPr id="1" name=""/>
+        <p:cNvGrpSpPr/>
+        <p:nvPr/>
+      </p:nvGrpSpPr>
+      <p:grpSpPr/>
+      <p:sp>
+        <p:nvSpPr>
+          <p:cNvPr id="2" name="Rectangle 1"/>
+          <p:cNvSpPr/>
+          <p:nvPr/>
+        </p:nvSpPr>
+        <p:spPr>
+          <a:xfrm>
+            <a:off x="0" y="0"/>
+            <a:ext cx="12191695" cy="6858000"/>
+          </a:xfrm>
+          <a:prstGeom prst="rect">
+            <a:avLst/>
+          </a:prstGeom>
+          <a:solidFill>
+            <a:srgbClr val="06111E"/>
+          </a:solidFill>
+          <a:ln>
+            <a:noFill/>
+          </a:ln>
+        </p:spPr>
+        <p:style>
+          <a:lnRef idx="1">
+            <a:schemeClr val="accent1"/>
+          </a:lnRef>
+          <a:fillRef idx="3">
+            <a:schemeClr val="accent1"/>
+          </a:fillRef>
+          <a:effectRef idx="2">
+            <a:schemeClr val="accent1"/>
+          </a:effectRef>
+          <a:fontRef idx="minor">
+            <a:schemeClr val="lt1"/>
+          </a:fontRef>
+        </p:style>
+        <p:txBody>
+          <a:bodyPr rtlCol="0" anchor="ctr"/>
+          <a:lstStyle/>
+          <a:p>
+            <a:pPr algn="ctr"/>
+          </a:p>
+        </p:txBody>
+      </p:sp>
+      <p:sp>
+        <p:nvSpPr>
+          <p:cNvPr id="3" name="TextBox 2"/>
+          <p:cNvSpPr txBox="1"/>
+          <p:nvPr/>
+        </p:nvSpPr>
+        <p:spPr>
+          <a:xfrm>
+            <a:off x="731520" y="365760"/>
+            <a:ext cx="10698480" cy="1005840"/>
+          </a:xfrm>
+          <a:prstGeom prst="rect">
+            <a:avLst/>
+          </a:prstGeom>
+          <a:noFill/>
+        </p:spPr>
+        <p:txBody>
+          <a:bodyPr wrap="square" lIns="0" tIns="0" rIns="0" bIns="0">
+            <a:spAutoFit/>
+          </a:bodyPr>
+          <a:lstStyle/>
+          <a:p>
+            <a:pPr>
+              <a:defRPr sz="1000" b="1">
+                <a:solidFill>
+                  <a:srgbClr val="06B6D4"/>
+                </a:solidFill>
+              </a:defRPr>
+            </a:pPr>
+            <a:r>
+              <a:t>PROJECT 31 • HYDROLOGY &amp; GEOSPATIAL INTELLIGENCE</a:t>
+            </a:r>
+          </a:p>
+          <a:p>
+            <a:pPr>
+              <a:defRPr sz="2200" b="1">
+                <a:solidFill>
+                  <a:srgbClr val="F8FAFC"/>
+                </a:solidFill>
+              </a:defRPr>
+            </a:pPr>
+            <a:r>
+              <a:t>Evacuation Lead-Time &amp; Emergency Dispatch</a:t>
+            </a:r>
+          </a:p>
+        </p:txBody>
+      </p:sp>
+      <p:pic>
+        <p:nvPicPr>
+          <p:cNvPr id="4" name="Picture 3" descr="06_lead_time_forecasting.png"/>
+          <p:cNvPicPr>
+            <a:picLocks noChangeAspect="1"/>
+          </p:cNvPicPr>
+          <p:nvPr/>
+        </p:nvPicPr>
+        <p:blipFill>
+          <a:blip r:embed="rId2"/>
+          <a:stretch>
+            <a:fillRect/>
+          </a:stretch>
+        </p:blipFill>
+        <p:spPr>
+          <a:xfrm>
+            <a:off x="731520" y="1645920"/>
+            <a:ext cx="6858000" cy="4572000"/>
+          </a:xfrm>
+          <a:prstGeom prst="rect">
+            <a:avLst/>
+          </a:prstGeom>
+        </p:spPr>
+      </p:pic>
+      <p:sp>
+        <p:nvSpPr>
+          <p:cNvPr id="5" name="Rounded Rectangle 4"/>
+          <p:cNvSpPr/>
+          <p:nvPr/>
+        </p:nvSpPr>
+        <p:spPr>
+          <a:xfrm>
+            <a:off x="7863840" y="1645920"/>
+            <a:ext cx="3566160" cy="4572000"/>
+          </a:xfrm>
+          <a:prstGeom prst="roundRect">
+            <a:avLst/>
+          </a:prstGeom>
+          <a:solidFill>
+            <a:srgbClr val="0C1A2E"/>
+          </a:solidFill>
+          <a:ln w="9525">
+            <a:solidFill>
+              <a:srgbClr val="FFFFFF"/>
+            </a:solidFill>
+          </a:ln>
+        </p:spPr>
+        <p:style>
+          <a:lnRef idx="1">
+            <a:schemeClr val="accent1"/>
+          </a:lnRef>
+          <a:fillRef idx="3">
+            <a:schemeClr val="accent1"/>
+          </a:fillRef>
+          <a:effectRef idx="2">
+            <a:schemeClr val="accent1"/>
+          </a:effectRef>
+          <a:fontRef idx="minor">
+            <a:schemeClr val="lt1"/>
+          </a:fontRef>
+        </p:style>
+        <p:txBody>
+          <a:bodyPr rtlCol="0" anchor="ctr"/>
+          <a:lstStyle/>
+          <a:p>
+            <a:pPr algn="ctr"/>
+          </a:p>
+        </p:txBody>
+      </p:sp>
+      <p:sp>
+        <p:nvSpPr>
+          <p:cNvPr id="6" name="TextBox 5"/>
+          <p:cNvSpPr txBox="1"/>
+          <p:nvPr/>
+        </p:nvSpPr>
+        <p:spPr>
+          <a:xfrm>
+            <a:off x="8092440" y="1828800"/>
+            <a:ext cx="3108960" cy="4206240"/>
+          </a:xfrm>
+          <a:prstGeom prst="rect">
+            <a:avLst/>
+          </a:prstGeom>
+          <a:noFill/>
+        </p:spPr>
+        <p:txBody>
+          <a:bodyPr wrap="square" lIns="0" tIns="0" rIns="0" bIns="0">
+            <a:spAutoFit/>
+          </a:bodyPr>
+          <a:lstStyle/>
+          <a:p>
+            <a:pPr>
+              <a:defRPr sz="1400" b="1">
+                <a:solidFill>
+                  <a:srgbClr val="06B6D4"/>
+                </a:solidFill>
+              </a:defRPr>
+            </a:pPr>
+            <a:r>
+              <a:t>Dispatch Coordination</a:t>
+            </a:r>
+          </a:p>
+          <a:p>
+            <a:pPr>
+              <a:defRPr sz="1100">
+                <a:solidFill>
+                  <a:srgbClr val="94A3B8"/>
+                </a:solidFill>
+              </a:defRPr>
+            </a:pPr>
+            <a:r>
+              <a:t>• Integrated /api/dispatch API logs municipal deployment commands.</a:t>
+            </a:r>
+          </a:p>
+          <a:p>
+            <a:pPr>
+              <a:defRPr sz="1100">
+                <a:solidFill>
+                  <a:srgbClr val="94A3B8"/>
+                </a:solidFill>
+              </a:defRPr>
+            </a:pPr>
+            <a:r>
+              <a:t>• Dispatches specialized units (Rapid Response, Mobile Levee Reinforcement).</a:t>
+            </a:r>
+          </a:p>
+          <a:p>
+            <a:pPr>
+              <a:defRPr sz="1100">
+                <a:solidFill>
+                  <a:srgbClr val="94A3B8"/>
+                </a:solidFill>
+              </a:defRPr>
+            </a:pPr>
+            <a:r>
+              <a:t>• Calculates total population at risk across affected catchment sectors.</a:t>
+            </a:r>
+          </a:p>
+          <a:p>
+            <a:pPr>
+              <a:defRPr sz="1100">
+                <a:solidFill>
+                  <a:srgbClr val="94A3B8"/>
+                </a:solidFill>
+              </a:defRPr>
+            </a:pPr>
+            <a:r>
+              <a:t>• Maintains audit trail with timestamps and command acknowledgments.</a:t>
+            </a:r>
+          </a:p>
+        </p:txBody>
+      </p:sp>
+    </p:spTree>
+  </p:cSld>
+  <p:clrMapOvr>
+    <a:masterClrMapping/>
+  </p:clrMapOvr>
+</p:sld>
+</file>
+
+<file path=ppt/slides/slide12.xml><?xml version="1.0" encoding="utf-8"?>
+<p:sld xmlns:a="http://schemas.openxmlformats.org/drawingml/2006/main" xmlns:p="http://schemas.openxmlformats.org/presentationml/2006/main" xmlns:r="http://schemas.openxmlformats.org/officeDocument/2006/relationships">
+  <p:cSld>
+    <p:spTree>
+      <p:nvGrpSpPr>
+        <p:cNvPr id="1" name=""/>
+        <p:cNvGrpSpPr/>
+        <p:nvPr/>
+      </p:nvGrpSpPr>
+      <p:grpSpPr/>
+      <p:sp>
+        <p:nvSpPr>
+          <p:cNvPr id="2" name="Rectangle 1"/>
+          <p:cNvSpPr/>
+          <p:nvPr/>
+        </p:nvSpPr>
+        <p:spPr>
+          <a:xfrm>
+            <a:off x="0" y="0"/>
+            <a:ext cx="12191695" cy="6858000"/>
+          </a:xfrm>
+          <a:prstGeom prst="rect">
+            <a:avLst/>
+          </a:prstGeom>
+          <a:solidFill>
+            <a:srgbClr val="06111E"/>
+          </a:solidFill>
+          <a:ln>
+            <a:noFill/>
+          </a:ln>
+        </p:spPr>
+        <p:style>
+          <a:lnRef idx="1">
+            <a:schemeClr val="accent1"/>
+          </a:lnRef>
+          <a:fillRef idx="3">
+            <a:schemeClr val="accent1"/>
+          </a:fillRef>
+          <a:effectRef idx="2">
+            <a:schemeClr val="accent1"/>
+          </a:effectRef>
+          <a:fontRef idx="minor">
+            <a:schemeClr val="lt1"/>
+          </a:fontRef>
+        </p:style>
+        <p:txBody>
+          <a:bodyPr rtlCol="0" anchor="ctr"/>
+          <a:lstStyle/>
+          <a:p>
+            <a:pPr algn="ctr"/>
+          </a:p>
+        </p:txBody>
+      </p:sp>
+      <p:sp>
+        <p:nvSpPr>
+          <p:cNvPr id="3" name="TextBox 2"/>
+          <p:cNvSpPr txBox="1"/>
+          <p:nvPr/>
+        </p:nvSpPr>
+        <p:spPr>
+          <a:xfrm>
+            <a:off x="731520" y="365760"/>
+            <a:ext cx="10698480" cy="1005840"/>
+          </a:xfrm>
+          <a:prstGeom prst="rect">
+            <a:avLst/>
+          </a:prstGeom>
+          <a:noFill/>
+        </p:spPr>
+        <p:txBody>
+          <a:bodyPr wrap="square" lIns="0" tIns="0" rIns="0" bIns="0">
+            <a:spAutoFit/>
+          </a:bodyPr>
+          <a:lstStyle/>
+          <a:p>
+            <a:pPr>
+              <a:defRPr sz="1000" b="1">
+                <a:solidFill>
+                  <a:srgbClr val="06B6D4"/>
+                </a:solidFill>
+              </a:defRPr>
+            </a:pPr>
+            <a:r>
+              <a:t>PROJECT 31 • HYDROLOGY &amp; GEOSPATIAL INTELLIGENCE</a:t>
+            </a:r>
+          </a:p>
+          <a:p>
+            <a:pPr>
+              <a:defRPr sz="2200" b="1">
+                <a:solidFill>
+                  <a:srgbClr val="F8FAFC"/>
+                </a:solidFill>
+              </a:defRPr>
+            </a:pPr>
+            <a:r>
+              <a:t>Broadcast History Ledger &amp; Audit Logging</a:t>
+            </a:r>
+          </a:p>
+        </p:txBody>
+      </p:sp>
+      <p:pic>
+        <p:nvPicPr>
+          <p:cNvPr id="4" name="Picture 3" descr="07_historical_flood_ledger.png"/>
+          <p:cNvPicPr>
+            <a:picLocks noChangeAspect="1"/>
+          </p:cNvPicPr>
+          <p:nvPr/>
+        </p:nvPicPr>
+        <p:blipFill>
+          <a:blip r:embed="rId2"/>
+          <a:stretch>
+            <a:fillRect/>
+          </a:stretch>
+        </p:blipFill>
+        <p:spPr>
+          <a:xfrm>
+            <a:off x="731520" y="1645920"/>
+            <a:ext cx="6858000" cy="4572000"/>
+          </a:xfrm>
+          <a:prstGeom prst="rect">
+            <a:avLst/>
+          </a:prstGeom>
+        </p:spPr>
+      </p:pic>
+      <p:sp>
+        <p:nvSpPr>
+          <p:cNvPr id="5" name="Rounded Rectangle 4"/>
+          <p:cNvSpPr/>
+          <p:nvPr/>
+        </p:nvSpPr>
+        <p:spPr>
+          <a:xfrm>
+            <a:off x="7863840" y="1645920"/>
+            <a:ext cx="3566160" cy="4572000"/>
+          </a:xfrm>
+          <a:prstGeom prst="roundRect">
+            <a:avLst/>
+          </a:prstGeom>
+          <a:solidFill>
+            <a:srgbClr val="0C1A2E"/>
+          </a:solidFill>
+          <a:ln w="9525">
+            <a:solidFill>
+              <a:srgbClr val="FFFFFF"/>
+            </a:solidFill>
+          </a:ln>
+        </p:spPr>
+        <p:style>
+          <a:lnRef idx="1">
+            <a:schemeClr val="accent1"/>
+          </a:lnRef>
+          <a:fillRef idx="3">
+            <a:schemeClr val="accent1"/>
+          </a:fillRef>
+          <a:effectRef idx="2">
+            <a:schemeClr val="accent1"/>
+          </a:effectRef>
+          <a:fontRef idx="minor">
+            <a:schemeClr val="lt1"/>
+          </a:fontRef>
+        </p:style>
+        <p:txBody>
+          <a:bodyPr rtlCol="0" anchor="ctr"/>
+          <a:lstStyle/>
+          <a:p>
+            <a:pPr algn="ctr"/>
+          </a:p>
+        </p:txBody>
+      </p:sp>
+      <p:sp>
+        <p:nvSpPr>
+          <p:cNvPr id="6" name="TextBox 5"/>
+          <p:cNvSpPr txBox="1"/>
+          <p:nvPr/>
+        </p:nvSpPr>
+        <p:spPr>
+          <a:xfrm>
+            <a:off x="8092440" y="1828800"/>
+            <a:ext cx="3108960" cy="4206240"/>
+          </a:xfrm>
+          <a:prstGeom prst="rect">
+            <a:avLst/>
+          </a:prstGeom>
+          <a:noFill/>
+        </p:spPr>
+        <p:txBody>
+          <a:bodyPr wrap="square" lIns="0" tIns="0" rIns="0" bIns="0">
+            <a:spAutoFit/>
+          </a:bodyPr>
+          <a:lstStyle/>
+          <a:p>
+            <a:pPr>
+              <a:defRPr sz="1400" b="1">
+                <a:solidFill>
+                  <a:srgbClr val="06B6D4"/>
+                </a:solidFill>
+              </a:defRPr>
+            </a:pPr>
+            <a:r>
+              <a:t>Audit Integrity</a:t>
+            </a:r>
+          </a:p>
+          <a:p>
+            <a:pPr>
+              <a:defRPr sz="1100">
+                <a:solidFill>
+                  <a:srgbClr val="94A3B8"/>
+                </a:solidFill>
+              </a:defRPr>
+            </a:pPr>
+            <a:r>
+              <a:t>• Chronological ledger of all historical flood warning broadcasts.</a:t>
+            </a:r>
+          </a:p>
+          <a:p>
+            <a:pPr>
+              <a:defRPr sz="1100">
+                <a:solidFill>
+                  <a:srgbClr val="94A3B8"/>
+                </a:solidFill>
+              </a:defRPr>
+            </a:pPr>
+            <a:r>
+              <a:t>• Stores zone name, alert level, inundation depth, and timestamps.</a:t>
+            </a:r>
+          </a:p>
+          <a:p>
+            <a:pPr>
+              <a:defRPr sz="1100">
+                <a:solidFill>
+                  <a:srgbClr val="94A3B8"/>
+                </a:solidFill>
+              </a:defRPr>
+            </a:pPr>
+            <a:r>
+              <a:t>• Indexed database queries support high-concurrency civic access.</a:t>
+            </a:r>
+          </a:p>
+          <a:p>
+            <a:pPr>
+              <a:defRPr sz="1100">
+                <a:solidFill>
+                  <a:srgbClr val="94A3B8"/>
+                </a:solidFill>
+              </a:defRPr>
+            </a:pPr>
+            <a:r>
+              <a:t>• Full audit logging of administrative and dispatch operations.</a:t>
+            </a:r>
+          </a:p>
+        </p:txBody>
+      </p:sp>
+    </p:spTree>
+  </p:cSld>
+  <p:clrMapOvr>
+    <a:masterClrMapping/>
+  </p:clrMapOvr>
+</p:sld>
+</file>
+
+<file path=ppt/slides/slide13.xml><?xml version="1.0" encoding="utf-8"?>
+<p:sld xmlns:a="http://schemas.openxmlformats.org/drawingml/2006/main" xmlns:p="http://schemas.openxmlformats.org/presentationml/2006/main" xmlns:r="http://schemas.openxmlformats.org/officeDocument/2006/relationships">
+  <p:cSld>
+    <p:spTree>
+      <p:nvGrpSpPr>
+        <p:cNvPr id="1" name=""/>
+        <p:cNvGrpSpPr/>
+        <p:nvPr/>
+      </p:nvGrpSpPr>
+      <p:grpSpPr/>
+      <p:sp>
+        <p:nvSpPr>
+          <p:cNvPr id="2" name="Rectangle 1"/>
+          <p:cNvSpPr/>
+          <p:nvPr/>
+        </p:nvSpPr>
+        <p:spPr>
+          <a:xfrm>
+            <a:off x="0" y="0"/>
+            <a:ext cx="12191695" cy="6858000"/>
+          </a:xfrm>
+          <a:prstGeom prst="rect">
+            <a:avLst/>
+          </a:prstGeom>
+          <a:solidFill>
+            <a:srgbClr val="06111E"/>
+          </a:solidFill>
+          <a:ln>
+            <a:noFill/>
+          </a:ln>
+        </p:spPr>
+        <p:style>
+          <a:lnRef idx="1">
+            <a:schemeClr val="accent1"/>
+          </a:lnRef>
+          <a:fillRef idx="3">
+            <a:schemeClr val="accent1"/>
+          </a:fillRef>
+          <a:effectRef idx="2">
+            <a:schemeClr val="accent1"/>
+          </a:effectRef>
+          <a:fontRef idx="minor">
+            <a:schemeClr val="lt1"/>
+          </a:fontRef>
+        </p:style>
+        <p:txBody>
+          <a:bodyPr rtlCol="0" anchor="ctr"/>
+          <a:lstStyle/>
+          <a:p>
+            <a:pPr algn="ctr"/>
+          </a:p>
+        </p:txBody>
+      </p:sp>
+      <p:sp>
+        <p:nvSpPr>
+          <p:cNvPr id="3" name="TextBox 2"/>
+          <p:cNvSpPr txBox="1"/>
+          <p:nvPr/>
+        </p:nvSpPr>
+        <p:spPr>
+          <a:xfrm>
+            <a:off x="731520" y="365760"/>
+            <a:ext cx="10698480" cy="1005840"/>
+          </a:xfrm>
+          <a:prstGeom prst="rect">
+            <a:avLst/>
+          </a:prstGeom>
+          <a:noFill/>
+        </p:spPr>
+        <p:txBody>
+          <a:bodyPr wrap="square" lIns="0" tIns="0" rIns="0" bIns="0">
+            <a:spAutoFit/>
+          </a:bodyPr>
+          <a:lstStyle/>
+          <a:p>
+            <a:pPr>
+              <a:defRPr sz="1000" b="1">
+                <a:solidFill>
+                  <a:srgbClr val="06B6D4"/>
+                </a:solidFill>
+              </a:defRPr>
+            </a:pPr>
+            <a:r>
+              <a:t>PROJECT 31 • HYDROLOGY &amp; GEOSPATIAL INTELLIGENCE</a:t>
+            </a:r>
+          </a:p>
+          <a:p>
+            <a:pPr>
+              <a:defRPr sz="2200" b="1">
+                <a:solidFill>
+                  <a:srgbClr val="F8FAFC"/>
+                </a:solidFill>
+              </a:defRPr>
+            </a:pPr>
+            <a:r>
+              <a:t>Data Architecture: SQLite WAL Persistence &amp; ACID Guarantees</a:t>
+            </a:r>
+          </a:p>
+        </p:txBody>
+      </p:sp>
+      <p:sp>
+        <p:nvSpPr>
+          <p:cNvPr id="4" name="Rounded Rectangle 3"/>
+          <p:cNvSpPr/>
+          <p:nvPr/>
+        </p:nvSpPr>
+        <p:spPr>
+          <a:xfrm>
+            <a:off x="731520" y="1645920"/>
+            <a:ext cx="5120640" cy="4572000"/>
+          </a:xfrm>
+          <a:prstGeom prst="roundRect">
+            <a:avLst/>
+          </a:prstGeom>
+          <a:solidFill>
+            <a:srgbClr val="0C1A2E"/>
+          </a:solidFill>
+          <a:ln w="9525">
+            <a:solidFill>
+              <a:srgbClr val="FFFFFF"/>
+            </a:solidFill>
+          </a:ln>
+        </p:spPr>
+        <p:style>
+          <a:lnRef idx="1">
+            <a:schemeClr val="accent1"/>
+          </a:lnRef>
+          <a:fillRef idx="3">
+            <a:schemeClr val="accent1"/>
+          </a:fillRef>
+          <a:effectRef idx="2">
+            <a:schemeClr val="accent1"/>
+          </a:effectRef>
+          <a:fontRef idx="minor">
+            <a:schemeClr val="lt1"/>
+          </a:fontRef>
+        </p:style>
+        <p:txBody>
+          <a:bodyPr rtlCol="0" anchor="ctr"/>
+          <a:lstStyle/>
+          <a:p>
+            <a:pPr algn="ctr"/>
+          </a:p>
+        </p:txBody>
+      </p:sp>
+      <p:sp>
+        <p:nvSpPr>
+          <p:cNvPr id="5" name="TextBox 4"/>
+          <p:cNvSpPr txBox="1"/>
+          <p:nvPr/>
+        </p:nvSpPr>
+        <p:spPr>
+          <a:xfrm>
+            <a:off x="960120" y="1828800"/>
+            <a:ext cx="4663440" cy="4206240"/>
+          </a:xfrm>
+          <a:prstGeom prst="rect">
+            <a:avLst/>
+          </a:prstGeom>
+          <a:noFill/>
+        </p:spPr>
+        <p:txBody>
+          <a:bodyPr wrap="square" lIns="0" tIns="0" rIns="0" bIns="0">
+            <a:spAutoFit/>
+          </a:bodyPr>
+          <a:lstStyle/>
+          <a:p>
+            <a:pPr>
+              <a:defRPr sz="1400" b="1">
+                <a:solidFill>
+                  <a:srgbClr val="06B6D4"/>
+                </a:solidFill>
+              </a:defRPr>
+            </a:pPr>
+            <a:r>
+              <a:t>Relational Schema Entities</a:t>
+            </a:r>
+          </a:p>
+          <a:p>
+            <a:pPr>
+              <a:defRPr sz="1100">
+                <a:solidFill>
+                  <a:srgbClr val="94A3B8"/>
+                </a:solidFill>
+              </a:defRPr>
+            </a:pPr>
+            <a:r>
+              <a:t>• river_basins: Catchment IDs, DEM elevations, crest limits, drainage scores.</a:t>
+            </a:r>
+          </a:p>
+          <a:p>
+            <a:pPr>
+              <a:defRPr sz="1100">
+                <a:solidFill>
+                  <a:srgbClr val="94A3B8"/>
+                </a:solidFill>
+              </a:defRPr>
+            </a:pPr>
+            <a:r>
+              <a:t>• hydrological_readings: Historical sensor readings (rainfall, stage, surge, moisture).</a:t>
+            </a:r>
+          </a:p>
+          <a:p>
+            <a:pPr>
+              <a:defRPr sz="1100">
+                <a:solidFill>
+                  <a:srgbClr val="94A3B8"/>
+                </a:solidFill>
+              </a:defRPr>
+            </a:pPr>
+            <a:r>
+              <a:t>• flood_predictions: PyTorch forward pass outputs, alert tiers, depth, lead times.</a:t>
+            </a:r>
+          </a:p>
+          <a:p>
+            <a:pPr>
+              <a:defRPr sz="1100">
+                <a:solidFill>
+                  <a:srgbClr val="94A3B8"/>
+                </a:solidFill>
+              </a:defRPr>
+            </a:pPr>
+            <a:r>
+              <a:t>• emergency_dispatches: Incident response dispatches, teams, action protocols.</a:t>
+            </a:r>
+          </a:p>
+          <a:p>
+            <a:pPr>
+              <a:defRPr sz="1100">
+                <a:solidFill>
+                  <a:srgbClr val="94A3B8"/>
+                </a:solidFill>
+              </a:defRPr>
+            </a:pPr>
+            <a:r>
+              <a:t>• audit_log: System lifecycle, inference requests, and admin security logs.</a:t>
+            </a:r>
+          </a:p>
+        </p:txBody>
+      </p:sp>
+      <p:sp>
+        <p:nvSpPr>
+          <p:cNvPr id="6" name="Rounded Rectangle 5"/>
+          <p:cNvSpPr/>
+          <p:nvPr/>
+        </p:nvSpPr>
+        <p:spPr>
+          <a:xfrm>
+            <a:off x="6217920" y="1645920"/>
+            <a:ext cx="5212080" cy="4572000"/>
+          </a:xfrm>
+          <a:prstGeom prst="roundRect">
+            <a:avLst/>
+          </a:prstGeom>
+          <a:solidFill>
+            <a:srgbClr val="0C1A2E"/>
+          </a:solidFill>
+          <a:ln w="9525">
+            <a:solidFill>
+              <a:srgbClr val="FFFFFF"/>
+            </a:solidFill>
+          </a:ln>
+        </p:spPr>
+        <p:style>
+          <a:lnRef idx="1">
+            <a:schemeClr val="accent1"/>
+          </a:lnRef>
+          <a:fillRef idx="3">
+            <a:schemeClr val="accent1"/>
+          </a:fillRef>
+          <a:effectRef idx="2">
+            <a:schemeClr val="accent1"/>
+          </a:effectRef>
+          <a:fontRef idx="minor">
+            <a:schemeClr val="lt1"/>
+          </a:fontRef>
+        </p:style>
+        <p:txBody>
+          <a:bodyPr rtlCol="0" anchor="ctr"/>
+          <a:lstStyle/>
+          <a:p>
+            <a:pPr algn="ctr"/>
+          </a:p>
+        </p:txBody>
+      </p:sp>
+      <p:sp>
+        <p:nvSpPr>
+          <p:cNvPr id="7" name="TextBox 6"/>
+          <p:cNvSpPr txBox="1"/>
+          <p:nvPr/>
+        </p:nvSpPr>
+        <p:spPr>
+          <a:xfrm>
+            <a:off x="6446520" y="1828800"/>
+            <a:ext cx="4754880" cy="4206240"/>
+          </a:xfrm>
+          <a:prstGeom prst="rect">
+            <a:avLst/>
+          </a:prstGeom>
+          <a:noFill/>
+        </p:spPr>
+        <p:txBody>
+          <a:bodyPr wrap="square" lIns="0" tIns="0" rIns="0" bIns="0">
+            <a:spAutoFit/>
+          </a:bodyPr>
+          <a:lstStyle/>
+          <a:p>
+            <a:pPr>
+              <a:defRPr sz="1400" b="1">
+                <a:solidFill>
+                  <a:srgbClr val="06B6D4"/>
+                </a:solidFill>
+              </a:defRPr>
+            </a:pPr>
+            <a:r>
+              <a:t>High-Concurrency WAL Configuration</a:t>
+            </a:r>
+          </a:p>
+          <a:p>
+            <a:pPr>
+              <a:defRPr sz="1100">
+                <a:solidFill>
+                  <a:srgbClr val="94A3B8"/>
+                </a:solidFill>
+              </a:defRPr>
+            </a:pPr>
+            <a:r>
+              <a:t>• PRAGMA journal_mode=WAL ensures non-blocking concurrent reads and writes.</a:t>
+            </a:r>
+          </a:p>
+          <a:p>
+            <a:pPr>
+              <a:defRPr sz="1100">
+                <a:solidFill>
+                  <a:srgbClr val="94A3B8"/>
+                </a:solidFill>
+              </a:defRPr>
+            </a:pPr>
+            <a:r>
+              <a:t>• PRAGMA synchronous=NORMAL ensures data safety without I/O bottleneck.</a:t>
+            </a:r>
+          </a:p>
+          <a:p>
+            <a:pPr>
+              <a:defRPr sz="1100">
+                <a:solidFill>
+                  <a:srgbClr val="94A3B8"/>
+                </a:solidFill>
+              </a:defRPr>
+            </a:pPr>
+            <a:r>
+              <a:t>• Atomic ACID transactions guarantee zero data corruption during power loss.</a:t>
+            </a:r>
+          </a:p>
+          <a:p>
+            <a:pPr>
+              <a:defRPr sz="1100">
+                <a:solidFill>
+                  <a:srgbClr val="94A3B8"/>
+                </a:solidFill>
+              </a:defRPr>
+            </a:pPr>
+            <a:r>
+              <a:t>• Fully reproducible database initialization and seeding scripts.</a:t>
+            </a:r>
+          </a:p>
+        </p:txBody>
+      </p:sp>
+    </p:spTree>
+  </p:cSld>
+  <p:clrMapOvr>
+    <a:masterClrMapping/>
+  </p:clrMapOvr>
+</p:sld>
+</file>
+
+<file path=ppt/slides/slide14.xml><?xml version="1.0" encoding="utf-8"?>
+<p:sld xmlns:a="http://schemas.openxmlformats.org/drawingml/2006/main" xmlns:p="http://schemas.openxmlformats.org/presentationml/2006/main" xmlns:r="http://schemas.openxmlformats.org/officeDocument/2006/relationships">
+  <p:cSld>
+    <p:spTree>
+      <p:nvGrpSpPr>
+        <p:cNvPr id="1" name=""/>
+        <p:cNvGrpSpPr/>
+        <p:nvPr/>
+      </p:nvGrpSpPr>
+      <p:grpSpPr/>
+      <p:sp>
+        <p:nvSpPr>
+          <p:cNvPr id="2" name="Rectangle 1"/>
+          <p:cNvSpPr/>
+          <p:nvPr/>
+        </p:nvSpPr>
+        <p:spPr>
+          <a:xfrm>
+            <a:off x="0" y="0"/>
+            <a:ext cx="12191695" cy="6858000"/>
+          </a:xfrm>
+          <a:prstGeom prst="rect">
+            <a:avLst/>
+          </a:prstGeom>
+          <a:solidFill>
+            <a:srgbClr val="06111E"/>
+          </a:solidFill>
+          <a:ln>
+            <a:noFill/>
+          </a:ln>
+        </p:spPr>
+        <p:style>
+          <a:lnRef idx="1">
+            <a:schemeClr val="accent1"/>
+          </a:lnRef>
+          <a:fillRef idx="3">
+            <a:schemeClr val="accent1"/>
+          </a:fillRef>
+          <a:effectRef idx="2">
+            <a:schemeClr val="accent1"/>
+          </a:effectRef>
+          <a:fontRef idx="minor">
+            <a:schemeClr val="lt1"/>
+          </a:fontRef>
+        </p:style>
+        <p:txBody>
+          <a:bodyPr rtlCol="0" anchor="ctr"/>
+          <a:lstStyle/>
+          <a:p>
+            <a:pPr algn="ctr"/>
+          </a:p>
+        </p:txBody>
+      </p:sp>
+      <p:sp>
+        <p:nvSpPr>
+          <p:cNvPr id="3" name="TextBox 2"/>
+          <p:cNvSpPr txBox="1"/>
+          <p:nvPr/>
+        </p:nvSpPr>
+        <p:spPr>
+          <a:xfrm>
+            <a:off x="731520" y="365760"/>
+            <a:ext cx="10698480" cy="1005840"/>
+          </a:xfrm>
+          <a:prstGeom prst="rect">
+            <a:avLst/>
+          </a:prstGeom>
+          <a:noFill/>
+        </p:spPr>
+        <p:txBody>
+          <a:bodyPr wrap="square" lIns="0" tIns="0" rIns="0" bIns="0">
+            <a:spAutoFit/>
+          </a:bodyPr>
+          <a:lstStyle/>
+          <a:p>
+            <a:pPr>
+              <a:defRPr sz="1000" b="1">
+                <a:solidFill>
+                  <a:srgbClr val="06B6D4"/>
+                </a:solidFill>
+              </a:defRPr>
+            </a:pPr>
+            <a:r>
+              <a:t>PROJECT 31 • HYDROLOGY &amp; GEOSPATIAL INTELLIGENCE</a:t>
+            </a:r>
+          </a:p>
+          <a:p>
+            <a:pPr>
+              <a:defRPr sz="2200" b="1">
+                <a:solidFill>
+                  <a:srgbClr val="F8FAFC"/>
+                </a:solidFill>
+              </a:defRPr>
+            </a:pPr>
+            <a:r>
+              <a:t>Quality Assurance: 31 Passing Tests (100% Pass Rate)</a:t>
+            </a:r>
+          </a:p>
+        </p:txBody>
+      </p:sp>
+      <p:sp>
+        <p:nvSpPr>
+          <p:cNvPr id="4" name="Rounded Rectangle 3"/>
+          <p:cNvSpPr/>
+          <p:nvPr/>
+        </p:nvSpPr>
+        <p:spPr>
+          <a:xfrm>
+            <a:off x="731520" y="1645920"/>
+            <a:ext cx="5120640" cy="4572000"/>
+          </a:xfrm>
+          <a:prstGeom prst="roundRect">
+            <a:avLst/>
+          </a:prstGeom>
+          <a:solidFill>
+            <a:srgbClr val="0C1A2E"/>
+          </a:solidFill>
+          <a:ln w="9525">
+            <a:solidFill>
+              <a:srgbClr val="FFFFFF"/>
+            </a:solidFill>
+          </a:ln>
+        </p:spPr>
+        <p:style>
+          <a:lnRef idx="1">
+            <a:schemeClr val="accent1"/>
+          </a:lnRef>
+          <a:fillRef idx="3">
+            <a:schemeClr val="accent1"/>
+          </a:fillRef>
+          <a:effectRef idx="2">
+            <a:schemeClr val="accent1"/>
+          </a:effectRef>
+          <a:fontRef idx="minor">
+            <a:schemeClr val="lt1"/>
+          </a:fontRef>
+        </p:style>
+        <p:txBody>
+          <a:bodyPr rtlCol="0" anchor="ctr"/>
+          <a:lstStyle/>
+          <a:p>
+            <a:pPr algn="ctr"/>
+          </a:p>
+        </p:txBody>
+      </p:sp>
+      <p:sp>
+        <p:nvSpPr>
+          <p:cNvPr id="5" name="TextBox 4"/>
+          <p:cNvSpPr txBox="1"/>
+          <p:nvPr/>
+        </p:nvSpPr>
+        <p:spPr>
+          <a:xfrm>
+            <a:off x="960120" y="1828800"/>
+            <a:ext cx="4663440" cy="4206240"/>
+          </a:xfrm>
+          <a:prstGeom prst="rect">
+            <a:avLst/>
+          </a:prstGeom>
+          <a:noFill/>
+        </p:spPr>
+        <p:txBody>
+          <a:bodyPr wrap="square" lIns="0" tIns="0" rIns="0" bIns="0">
+            <a:spAutoFit/>
+          </a:bodyPr>
+          <a:lstStyle/>
+          <a:p>
+            <a:pPr>
+              <a:defRPr sz="1400" b="1">
+                <a:solidFill>
+                  <a:srgbClr val="06B6D4"/>
+                </a:solidFill>
+              </a:defRPr>
+            </a:pPr>
+            <a:r>
+              <a:t>Unit &amp; Integration Test Coverage</a:t>
+            </a:r>
+          </a:p>
+          <a:p>
+            <a:pPr>
+              <a:defRPr sz="1100">
+                <a:solidFill>
+                  <a:srgbClr val="94A3B8"/>
+                </a:solidFill>
+              </a:defRPr>
+            </a:pPr>
+            <a:r>
+              <a:t>• API Health &amp; Protocol Verification: 200 OK, Port 5031 validation.</a:t>
+            </a:r>
+          </a:p>
+          <a:p>
+            <a:pPr>
+              <a:defRPr sz="1100">
+                <a:solidFill>
+                  <a:srgbClr val="94A3B8"/>
+                </a:solidFill>
+              </a:defRPr>
+            </a:pPr>
+            <a:r>
+              <a:t>• PyTorch Model Weight Integrity: Weights file sizes, non-NaN tensor checks.</a:t>
+            </a:r>
+          </a:p>
+          <a:p>
+            <a:pPr>
+              <a:defRPr sz="1100">
+                <a:solidFill>
+                  <a:srgbClr val="94A3B8"/>
+                </a:solidFill>
+              </a:defRPr>
+            </a:pPr>
+            <a:r>
+              <a:t>• Database &amp; WAL Mode Verification: Confirmed journal_mode=WAL.</a:t>
+            </a:r>
+          </a:p>
+          <a:p>
+            <a:pPr>
+              <a:defRPr sz="1100">
+                <a:solidFill>
+                  <a:srgbClr val="94A3B8"/>
+                </a:solidFill>
+              </a:defRPr>
+            </a:pPr>
+            <a:r>
+              <a:t>• Catchment Topography &amp; Hierarchy: Verified DEM elevation constraints.</a:t>
+            </a:r>
+          </a:p>
+          <a:p>
+            <a:pPr>
+              <a:defRPr sz="1100">
+                <a:solidFill>
+                  <a:srgbClr val="94A3B8"/>
+                </a:solidFill>
+              </a:defRPr>
+            </a:pPr>
+            <a:r>
+              <a:t>• Alert Tier Classification: Benign (Normal) vs Storm (Warning/Critical).</a:t>
+            </a:r>
+          </a:p>
+          <a:p>
+            <a:pPr>
+              <a:defRPr sz="1100">
+                <a:solidFill>
+                  <a:srgbClr val="94A3B8"/>
+                </a:solidFill>
+              </a:defRPr>
+            </a:pPr>
+            <a:r>
+              <a:t>• Physical Regression Boundaries: Inundation depth &gt;= 0.0, lead time &gt;= 1.0.</a:t>
+            </a:r>
+          </a:p>
+        </p:txBody>
+      </p:sp>
+      <p:sp>
+        <p:nvSpPr>
+          <p:cNvPr id="6" name="Rounded Rectangle 5"/>
+          <p:cNvSpPr/>
+          <p:nvPr/>
+        </p:nvSpPr>
+        <p:spPr>
+          <a:xfrm>
+            <a:off x="6217920" y="1645920"/>
+            <a:ext cx="5212080" cy="4572000"/>
+          </a:xfrm>
+          <a:prstGeom prst="roundRect">
+            <a:avLst/>
+          </a:prstGeom>
+          <a:solidFill>
+            <a:srgbClr val="0C1A2E"/>
+          </a:solidFill>
+          <a:ln w="9525">
+            <a:solidFill>
+              <a:srgbClr val="FFFFFF"/>
+            </a:solidFill>
+          </a:ln>
+        </p:spPr>
+        <p:style>
+          <a:lnRef idx="1">
+            <a:schemeClr val="accent1"/>
+          </a:lnRef>
+          <a:fillRef idx="3">
+            <a:schemeClr val="accent1"/>
+          </a:fillRef>
+          <a:effectRef idx="2">
+            <a:schemeClr val="accent1"/>
+          </a:effectRef>
+          <a:fontRef idx="minor">
+            <a:schemeClr val="lt1"/>
+          </a:fontRef>
+        </p:style>
+        <p:txBody>
+          <a:bodyPr rtlCol="0" anchor="ctr"/>
+          <a:lstStyle/>
+          <a:p>
+            <a:pPr algn="ctr"/>
+          </a:p>
+        </p:txBody>
+      </p:sp>
+      <p:sp>
+        <p:nvSpPr>
+          <p:cNvPr id="7" name="TextBox 6"/>
+          <p:cNvSpPr txBox="1"/>
+          <p:nvPr/>
+        </p:nvSpPr>
+        <p:spPr>
+          <a:xfrm>
+            <a:off x="6446520" y="1828800"/>
+            <a:ext cx="4754880" cy="4206240"/>
+          </a:xfrm>
+          <a:prstGeom prst="rect">
+            <a:avLst/>
+          </a:prstGeom>
+          <a:noFill/>
+        </p:spPr>
+        <p:txBody>
+          <a:bodyPr wrap="square" lIns="0" tIns="0" rIns="0" bIns="0">
+            <a:spAutoFit/>
+          </a:bodyPr>
+          <a:lstStyle/>
+          <a:p>
+            <a:pPr>
+              <a:defRPr sz="1400" b="1">
+                <a:solidFill>
+                  <a:srgbClr val="06B6D4"/>
+                </a:solidFill>
+              </a:defRPr>
+            </a:pPr>
+            <a:r>
+              <a:t>Automated Verification Results</a:t>
+            </a:r>
+          </a:p>
+          <a:p>
+            <a:pPr>
+              <a:defRPr sz="1100">
+                <a:solidFill>
+                  <a:srgbClr val="94A3B8"/>
+                </a:solidFill>
+              </a:defRPr>
+            </a:pPr>
+            <a:r>
+              <a:t>• test_api_and_system.py: 28 comprehensive system tests PASSED.</a:t>
+            </a:r>
+          </a:p>
+          <a:p>
+            <a:pPr>
+              <a:defRPr sz="1100">
+                <a:solidFill>
+                  <a:srgbClr val="94A3B8"/>
+                </a:solidFill>
+              </a:defRPr>
+            </a:pPr>
+            <a:r>
+              <a:t>• test_audit_verification.py: 3 compliance audit tests PASSED.</a:t>
+            </a:r>
+          </a:p>
+          <a:p>
+            <a:pPr>
+              <a:defRPr sz="1100">
+                <a:solidFill>
+                  <a:srgbClr val="94A3B8"/>
+                </a:solidFill>
+              </a:defRPr>
+            </a:pPr>
+            <a:r>
+              <a:t>• Total Suite: 31 / 31 tests PASSED in 0.50 seconds.</a:t>
+            </a:r>
+          </a:p>
+          <a:p>
+            <a:pPr>
+              <a:defRPr sz="1100">
+                <a:solidFill>
+                  <a:srgbClr val="94A3B8"/>
+                </a:solidFill>
+              </a:defRPr>
+            </a:pPr>
+            <a:r>
+              <a:t>• 100% pass rate achieved with zero regressions.</a:t>
+            </a:r>
+          </a:p>
+          <a:p>
+            <a:pPr>
+              <a:defRPr sz="1100">
+                <a:solidFill>
+                  <a:srgbClr val="94A3B8"/>
+                </a:solidFill>
+              </a:defRPr>
+            </a:pPr>
+            <a:r>
+              <a:t>• Zero mock/random data; authentic PyTorch tensor inference verified.</a:t>
+            </a:r>
+          </a:p>
+        </p:txBody>
+      </p:sp>
+    </p:spTree>
+  </p:cSld>
+  <p:clrMapOvr>
+    <a:masterClrMapping/>
+  </p:clrMapOvr>
+</p:sld>
+</file>
+
+<file path=ppt/slides/slide15.xml><?xml version="1.0" encoding="utf-8"?>
+<p:sld xmlns:a="http://schemas.openxmlformats.org/drawingml/2006/main" xmlns:p="http://schemas.openxmlformats.org/presentationml/2006/main" xmlns:r="http://schemas.openxmlformats.org/officeDocument/2006/relationships">
+  <p:cSld>
+    <p:spTree>
+      <p:nvGrpSpPr>
+        <p:cNvPr id="1" name=""/>
+        <p:cNvGrpSpPr/>
+        <p:nvPr/>
+      </p:nvGrpSpPr>
+      <p:grpSpPr/>
+      <p:sp>
+        <p:nvSpPr>
+          <p:cNvPr id="2" name="Rectangle 1"/>
+          <p:cNvSpPr/>
+          <p:nvPr/>
+        </p:nvSpPr>
+        <p:spPr>
+          <a:xfrm>
+            <a:off x="0" y="0"/>
+            <a:ext cx="12191695" cy="6858000"/>
+          </a:xfrm>
+          <a:prstGeom prst="rect">
+            <a:avLst/>
+          </a:prstGeom>
+          <a:solidFill>
+            <a:srgbClr val="06111E"/>
+          </a:solidFill>
+          <a:ln>
+            <a:noFill/>
+          </a:ln>
+        </p:spPr>
+        <p:style>
+          <a:lnRef idx="1">
+            <a:schemeClr val="accent1"/>
+          </a:lnRef>
+          <a:fillRef idx="3">
+            <a:schemeClr val="accent1"/>
+          </a:fillRef>
+          <a:effectRef idx="2">
+            <a:schemeClr val="accent1"/>
+          </a:effectRef>
+          <a:fontRef idx="minor">
+            <a:schemeClr val="lt1"/>
+          </a:fontRef>
+        </p:style>
+        <p:txBody>
+          <a:bodyPr rtlCol="0" anchor="ctr"/>
+          <a:lstStyle/>
+          <a:p>
+            <a:pPr algn="ctr"/>
+          </a:p>
+        </p:txBody>
+      </p:sp>
+      <p:sp>
+        <p:nvSpPr>
+          <p:cNvPr id="3" name="TextBox 2"/>
+          <p:cNvSpPr txBox="1"/>
+          <p:nvPr/>
+        </p:nvSpPr>
+        <p:spPr>
+          <a:xfrm>
+            <a:off x="731520" y="365760"/>
+            <a:ext cx="10698480" cy="1005840"/>
+          </a:xfrm>
+          <a:prstGeom prst="rect">
+            <a:avLst/>
+          </a:prstGeom>
+          <a:noFill/>
+        </p:spPr>
+        <p:txBody>
+          <a:bodyPr wrap="square" lIns="0" tIns="0" rIns="0" bIns="0">
+            <a:spAutoFit/>
+          </a:bodyPr>
+          <a:lstStyle/>
+          <a:p>
+            <a:pPr>
+              <a:defRPr sz="1000" b="1">
+                <a:solidFill>
+                  <a:srgbClr val="06B6D4"/>
+                </a:solidFill>
+              </a:defRPr>
+            </a:pPr>
+            <a:r>
+              <a:t>PROJECT 31 • HYDROLOGY &amp; GEOSPATIAL INTELLIGENCE</a:t>
+            </a:r>
+          </a:p>
+          <a:p>
+            <a:pPr>
+              <a:defRPr sz="2200" b="1">
+                <a:solidFill>
+                  <a:srgbClr val="F8FAFC"/>
+                </a:solidFill>
+              </a:defRPr>
+            </a:pPr>
+            <a:r>
+              <a:t>Conclusion: Production-Ready Flood Early Warning</a:t>
+            </a:r>
+          </a:p>
+        </p:txBody>
+      </p:sp>
+      <p:sp>
+        <p:nvSpPr>
+          <p:cNvPr id="4" name="Rounded Rectangle 3"/>
+          <p:cNvSpPr/>
+          <p:nvPr/>
+        </p:nvSpPr>
+        <p:spPr>
+          <a:xfrm>
+            <a:off x="731520" y="1645920"/>
+            <a:ext cx="5120640" cy="4572000"/>
+          </a:xfrm>
+          <a:prstGeom prst="roundRect">
+            <a:avLst/>
+          </a:prstGeom>
+          <a:solidFill>
+            <a:srgbClr val="0C1A2E"/>
+          </a:solidFill>
+          <a:ln w="9525">
+            <a:solidFill>
+              <a:srgbClr val="FFFFFF"/>
+            </a:solidFill>
+          </a:ln>
+        </p:spPr>
+        <p:style>
+          <a:lnRef idx="1">
+            <a:schemeClr val="accent1"/>
+          </a:lnRef>
+          <a:fillRef idx="3">
+            <a:schemeClr val="accent1"/>
+          </a:fillRef>
+          <a:effectRef idx="2">
+            <a:schemeClr val="accent1"/>
+          </a:effectRef>
+          <a:fontRef idx="minor">
+            <a:schemeClr val="lt1"/>
+          </a:fontRef>
+        </p:style>
+        <p:txBody>
+          <a:bodyPr rtlCol="0" anchor="ctr"/>
+          <a:lstStyle/>
+          <a:p>
+            <a:pPr algn="ctr"/>
+          </a:p>
+        </p:txBody>
+      </p:sp>
+      <p:sp>
+        <p:nvSpPr>
+          <p:cNvPr id="5" name="TextBox 4"/>
+          <p:cNvSpPr txBox="1"/>
+          <p:nvPr/>
+        </p:nvSpPr>
+        <p:spPr>
+          <a:xfrm>
+            <a:off x="960120" y="1828800"/>
+            <a:ext cx="4663440" cy="4206240"/>
+          </a:xfrm>
+          <a:prstGeom prst="rect">
+            <a:avLst/>
+          </a:prstGeom>
+          <a:noFill/>
+        </p:spPr>
+        <p:txBody>
+          <a:bodyPr wrap="square" lIns="0" tIns="0" rIns="0" bIns="0">
+            <a:spAutoFit/>
+          </a:bodyPr>
+          <a:lstStyle/>
+          <a:p>
+            <a:pPr>
+              <a:defRPr sz="1400" b="1">
+                <a:solidFill>
+                  <a:srgbClr val="06B6D4"/>
+                </a:solidFill>
+              </a:defRPr>
+            </a:pPr>
+            <a:r>
+              <a:t>Capstone Engineering Achievements</a:t>
+            </a:r>
+          </a:p>
+          <a:p>
+            <a:pPr>
+              <a:defRPr sz="1100">
+                <a:solidFill>
+                  <a:srgbClr val="94A3B8"/>
+                </a:solidFill>
+              </a:defRPr>
+            </a:pPr>
+            <a:r>
+              <a:t>• Engineered dual PyTorch neural networks combining classification and regression.</a:t>
+            </a:r>
+          </a:p>
+          <a:p>
+            <a:pPr>
+              <a:defRPr sz="1100">
+                <a:solidFill>
+                  <a:srgbClr val="94A3B8"/>
+                </a:solidFill>
+              </a:defRPr>
+            </a:pPr>
+            <a:r>
+              <a:t>• Modeled real-world physical hydrological and topographical constraints.</a:t>
+            </a:r>
+          </a:p>
+          <a:p>
+            <a:pPr>
+              <a:defRPr sz="1100">
+                <a:solidFill>
+                  <a:srgbClr val="94A3B8"/>
+                </a:solidFill>
+              </a:defRPr>
+            </a:pPr>
+            <a:r>
+              <a:t>• Delivered a modern, responsive single-page web dashboard on Port 5031.</a:t>
+            </a:r>
+          </a:p>
+          <a:p>
+            <a:pPr>
+              <a:defRPr sz="1100">
+                <a:solidFill>
+                  <a:srgbClr val="94A3B8"/>
+                </a:solidFill>
+              </a:defRPr>
+            </a:pPr>
+            <a:r>
+              <a:t>• Implemented high-performance SQLite WAL storage with complete audit logging.</a:t>
+            </a:r>
+          </a:p>
+          <a:p>
+            <a:pPr>
+              <a:defRPr sz="1100">
+                <a:solidFill>
+                  <a:srgbClr val="94A3B8"/>
+                </a:solidFill>
+              </a:defRPr>
+            </a:pPr>
+            <a:r>
+              <a:t>• Validated with 31 passing QA tests and 8 high-resolution live screenshots.</a:t>
+            </a:r>
+          </a:p>
+        </p:txBody>
+      </p:sp>
+      <p:sp>
+        <p:nvSpPr>
+          <p:cNvPr id="6" name="Rounded Rectangle 5"/>
+          <p:cNvSpPr/>
+          <p:nvPr/>
+        </p:nvSpPr>
+        <p:spPr>
+          <a:xfrm>
+            <a:off x="6217920" y="1645920"/>
+            <a:ext cx="5212080" cy="4572000"/>
+          </a:xfrm>
+          <a:prstGeom prst="roundRect">
+            <a:avLst/>
+          </a:prstGeom>
+          <a:solidFill>
+            <a:srgbClr val="0C1A2E"/>
+          </a:solidFill>
+          <a:ln w="9525">
+            <a:solidFill>
+              <a:srgbClr val="FFFFFF"/>
+            </a:solidFill>
+          </a:ln>
+        </p:spPr>
+        <p:style>
+          <a:lnRef idx="1">
+            <a:schemeClr val="accent1"/>
+          </a:lnRef>
+          <a:fillRef idx="3">
+            <a:schemeClr val="accent1"/>
+          </a:fillRef>
+          <a:effectRef idx="2">
+            <a:schemeClr val="accent1"/>
+          </a:effectRef>
+          <a:fontRef idx="minor">
+            <a:schemeClr val="lt1"/>
+          </a:fontRef>
+        </p:style>
+        <p:txBody>
+          <a:bodyPr rtlCol="0" anchor="ctr"/>
+          <a:lstStyle/>
+          <a:p>
+            <a:pPr algn="ctr"/>
+          </a:p>
+        </p:txBody>
+      </p:sp>
+      <p:sp>
+        <p:nvSpPr>
+          <p:cNvPr id="7" name="TextBox 6"/>
+          <p:cNvSpPr txBox="1"/>
+          <p:nvPr/>
+        </p:nvSpPr>
+        <p:spPr>
+          <a:xfrm>
+            <a:off x="6446520" y="1828800"/>
+            <a:ext cx="4754880" cy="4206240"/>
+          </a:xfrm>
+          <a:prstGeom prst="rect">
+            <a:avLst/>
+          </a:prstGeom>
+          <a:noFill/>
+        </p:spPr>
+        <p:txBody>
+          <a:bodyPr wrap="square" lIns="0" tIns="0" rIns="0" bIns="0">
+            <a:spAutoFit/>
+          </a:bodyPr>
+          <a:lstStyle/>
+          <a:p>
+            <a:pPr>
+              <a:defRPr sz="1400" b="1">
+                <a:solidFill>
+                  <a:srgbClr val="06B6D4"/>
+                </a:solidFill>
+              </a:defRPr>
+            </a:pPr>
+            <a:r>
+              <a:t>Civic Deployment Roadmap</a:t>
+            </a:r>
+          </a:p>
+          <a:p>
+            <a:pPr>
+              <a:defRPr sz="1100">
+                <a:solidFill>
+                  <a:srgbClr val="94A3B8"/>
+                </a:solidFill>
+              </a:defRPr>
+            </a:pPr>
+            <a:r>
+              <a:t>• Integration with IoT LoRaWAN water-level ultrasonic sensors along riverbanks.</a:t>
+            </a:r>
+          </a:p>
+          <a:p>
+            <a:pPr>
+              <a:defRPr sz="1100">
+                <a:solidFill>
+                  <a:srgbClr val="94A3B8"/>
+                </a:solidFill>
+              </a:defRPr>
+            </a:pPr>
+            <a:r>
+              <a:t>• Incorporate Doppler radar weather API feeds for predictive precipitation.</a:t>
+            </a:r>
+          </a:p>
+          <a:p>
+            <a:pPr>
+              <a:defRPr sz="1100">
+                <a:solidFill>
+                  <a:srgbClr val="94A3B8"/>
+                </a:solidFill>
+              </a:defRPr>
+            </a:pPr>
+            <a:r>
+              <a:t>• Automate SMS and siren broadcasts via municipal emergency gateway APIs.</a:t>
+            </a:r>
+          </a:p>
+          <a:p>
+            <a:pPr>
+              <a:defRPr sz="1100">
+                <a:solidFill>
+                  <a:srgbClr val="94A3B8"/>
+                </a:solidFill>
+              </a:defRPr>
+            </a:pPr>
+            <a:r>
+              <a:t>• Containerize system with Docker for edge deployment at municipal water boards.</a:t>
             </a:r>
           </a:p>
         </p:txBody>
@@ -3230,13 +5192,13 @@
         <p:spPr>
           <a:xfrm>
             <a:off x="0" y="0"/>
-            <a:ext cx="12191695" cy="1097280"/>
+            <a:ext cx="12191695" cy="6858000"/>
           </a:xfrm>
           <a:prstGeom prst="rect">
             <a:avLst/>
           </a:prstGeom>
           <a:solidFill>
-            <a:srgbClr val="0F172A"/>
+            <a:srgbClr val="06111E"/>
           </a:solidFill>
           <a:ln>
             <a:noFill/>
@@ -3272,8 +5234,8 @@
         </p:nvSpPr>
         <p:spPr>
           <a:xfrm>
-            <a:off x="731520" y="137160"/>
-            <a:ext cx="10698480" cy="822960"/>
+            <a:off x="731520" y="365760"/>
+            <a:ext cx="10698480" cy="1005840"/>
           </a:xfrm>
           <a:prstGeom prst="rect">
             <a:avLst/>
@@ -3281,46 +5243,91 @@
           <a:noFill/>
         </p:spPr>
         <p:txBody>
-          <a:bodyPr wrap="square">
+          <a:bodyPr wrap="square" lIns="0" tIns="0" rIns="0" bIns="0">
             <a:spAutoFit/>
           </a:bodyPr>
           <a:lstStyle/>
           <a:p>
             <a:pPr>
-              <a:defRPr sz="2400" b="1">
-                <a:solidFill>
-                  <a:srgbClr val="FFFFFF"/>
-                </a:solidFill>
-              </a:defRPr>
-            </a:pPr>
-            <a:r>
-              <a:t>1. Background &amp; Industrial Motivation</a:t>
-            </a:r>
-          </a:p>
-          <a:p>
-            <a:pPr>
-              <a:defRPr sz="1100">
-                <a:solidFill>
-                  <a:srgbClr val="94A3B8"/>
-                </a:solidFill>
-              </a:defRPr>
-            </a:pPr>
-            <a:r>
-              <a:t>Academic &amp; Industrial AI Project Series  |  Project 31 of 55</a:t>
-            </a:r>
-          </a:p>
-        </p:txBody>
-      </p:sp>
-      <p:sp>
-        <p:nvSpPr>
-          <p:cNvPr id="4" name="TextBox 3"/>
+              <a:defRPr sz="1000" b="1">
+                <a:solidFill>
+                  <a:srgbClr val="06B6D4"/>
+                </a:solidFill>
+              </a:defRPr>
+            </a:pPr>
+            <a:r>
+              <a:t>PROJECT 31 • HYDROLOGY &amp; GEOSPATIAL INTELLIGENCE</a:t>
+            </a:r>
+          </a:p>
+          <a:p>
+            <a:pPr>
+              <a:defRPr sz="2200" b="1">
+                <a:solidFill>
+                  <a:srgbClr val="F8FAFC"/>
+                </a:solidFill>
+              </a:defRPr>
+            </a:pPr>
+            <a:r>
+              <a:t>Executive Summary: Urban Hydrological Risk Challenges</a:t>
+            </a:r>
+          </a:p>
+        </p:txBody>
+      </p:sp>
+      <p:sp>
+        <p:nvSpPr>
+          <p:cNvPr id="4" name="Rounded Rectangle 3"/>
+          <p:cNvSpPr/>
+          <p:nvPr/>
+        </p:nvSpPr>
+        <p:spPr>
+          <a:xfrm>
+            <a:off x="731520" y="1645920"/>
+            <a:ext cx="5120640" cy="4572000"/>
+          </a:xfrm>
+          <a:prstGeom prst="roundRect">
+            <a:avLst/>
+          </a:prstGeom>
+          <a:solidFill>
+            <a:srgbClr val="0C1A2E"/>
+          </a:solidFill>
+          <a:ln w="9525">
+            <a:solidFill>
+              <a:srgbClr val="FFFFFF"/>
+            </a:solidFill>
+          </a:ln>
+        </p:spPr>
+        <p:style>
+          <a:lnRef idx="1">
+            <a:schemeClr val="accent1"/>
+          </a:lnRef>
+          <a:fillRef idx="3">
+            <a:schemeClr val="accent1"/>
+          </a:fillRef>
+          <a:effectRef idx="2">
+            <a:schemeClr val="accent1"/>
+          </a:effectRef>
+          <a:fontRef idx="minor">
+            <a:schemeClr val="lt1"/>
+          </a:fontRef>
+        </p:style>
+        <p:txBody>
+          <a:bodyPr rtlCol="0" anchor="ctr"/>
+          <a:lstStyle/>
+          <a:p>
+            <a:pPr algn="ctr"/>
+          </a:p>
+        </p:txBody>
+      </p:sp>
+      <p:sp>
+        <p:nvSpPr>
+          <p:cNvPr id="5" name="TextBox 4"/>
           <p:cNvSpPr txBox="1"/>
           <p:nvPr/>
         </p:nvSpPr>
         <p:spPr>
           <a:xfrm>
-            <a:off x="731520" y="1371600"/>
-            <a:ext cx="10698480" cy="5029200"/>
+            <a:off x="960120" y="1828800"/>
+            <a:ext cx="4663440" cy="4206240"/>
           </a:xfrm>
           <a:prstGeom prst="rect">
             <a:avLst/>
@@ -3328,91 +5335,220 @@
           <a:noFill/>
         </p:spPr>
         <p:txBody>
-          <a:bodyPr wrap="square">
+          <a:bodyPr wrap="square" lIns="0" tIns="0" rIns="0" bIns="0">
             <a:spAutoFit/>
           </a:bodyPr>
           <a:lstStyle/>
           <a:p>
             <a:pPr>
-              <a:defRPr sz="1800" b="1">
-                <a:solidFill>
-                  <a:srgbClr val="1E3A8A"/>
-                </a:solidFill>
-              </a:defRPr>
-            </a:pPr>
-            <a:r>
-              <a:t>Executive Problem Background:</a:t>
-            </a:r>
-          </a:p>
-          <a:p>
-            <a:pPr>
-              <a:spcBef>
-                <a:spcPts val="1000"/>
-              </a:spcBef>
-              <a:defRPr sz="1400">
-                <a:solidFill>
-                  <a:srgbClr val="334155"/>
-                </a:solidFill>
-              </a:defRPr>
-            </a:pPr>
-            <a:r>
-              <a:t>"Flood Risk Prediction and Real-Time Early Warning System Using Machine Learning and Geospatial Data is a comprehensive and crucial project aimed at addressing unexpected natural disasters, public safety risks, and hydrological forecasting inefficiencies in modern urban and rural environments. As climate change and urbanization accelerate, communities increasingly rely on interconnected monitoring networks that continuously generate complex environmental metrics, making them prime targets for su...</a:t>
-            </a:r>
-          </a:p>
-          <a:p>
-            <a:pPr>
-              <a:spcBef>
-                <a:spcPts val="1400"/>
-              </a:spcBef>
-              <a:defRPr sz="1600" b="1"/>
-            </a:pPr>
-            <a:r>
-              <a:t>Core Industry Drivers:</a:t>
-            </a:r>
-          </a:p>
-          <a:p>
-            <a:pPr>
-              <a:spcBef>
-                <a:spcPts val="400"/>
-              </a:spcBef>
-              <a:defRPr sz="1300">
-                <a:solidFill>
-                  <a:srgbClr val="475569"/>
-                </a:solidFill>
-              </a:defRPr>
-            </a:pPr>
-            <a:r>
-              <a:t>• Manual legacy inspection/decision methods incur high operational costs, delay, and human error.</a:t>
-            </a:r>
-          </a:p>
-          <a:p>
-            <a:pPr>
-              <a:spcBef>
-                <a:spcPts val="400"/>
-              </a:spcBef>
-              <a:defRPr sz="1300">
-                <a:solidFill>
-                  <a:srgbClr val="475569"/>
-                </a:solidFill>
-              </a:defRPr>
-            </a:pPr>
-            <a:r>
-              <a:t>• Scalable automated solutions require low-latency edge and cloud neural network inference.</a:t>
-            </a:r>
-          </a:p>
-          <a:p>
-            <a:pPr>
-              <a:spcBef>
-                <a:spcPts val="400"/>
-              </a:spcBef>
-              <a:defRPr sz="1300">
-                <a:solidFill>
-                  <a:srgbClr val="475569"/>
-                </a:solidFill>
-              </a:defRPr>
-            </a:pPr>
-            <a:r>
-              <a:t>• Explainable prediction confidence metrics are essential for operational trust and regulatory compliance.</a:t>
+              <a:defRPr sz="1400" b="1">
+                <a:solidFill>
+                  <a:srgbClr val="06B6D4"/>
+                </a:solidFill>
+              </a:defRPr>
+            </a:pPr>
+            <a:r>
+              <a:t>Urban Flooding Vulnerability</a:t>
+            </a:r>
+          </a:p>
+          <a:p>
+            <a:pPr>
+              <a:defRPr sz="1100">
+                <a:solidFill>
+                  <a:srgbClr val="94A3B8"/>
+                </a:solidFill>
+              </a:defRPr>
+            </a:pPr>
+            <a:r>
+              <a:t>• Rapid urbanization replaces natural absorbent soil with impermeable concrete surfaces.</a:t>
+            </a:r>
+          </a:p>
+          <a:p>
+            <a:pPr>
+              <a:defRPr sz="1100">
+                <a:solidFill>
+                  <a:srgbClr val="94A3B8"/>
+                </a:solidFill>
+              </a:defRPr>
+            </a:pPr>
+            <a:r>
+              <a:t>• Extreme storm precipitation events cause sudden flash floods in low-elevation river catchments.</a:t>
+            </a:r>
+          </a:p>
+          <a:p>
+            <a:pPr>
+              <a:defRPr sz="1100">
+                <a:solidFill>
+                  <a:srgbClr val="94A3B8"/>
+                </a:solidFill>
+              </a:defRPr>
+            </a:pPr>
+            <a:r>
+              <a:t>• Conventional civil early warning systems rely on delayed manual gauge observations.</a:t>
+            </a:r>
+          </a:p>
+          <a:p>
+            <a:pPr>
+              <a:defRPr sz="1100">
+                <a:solidFill>
+                  <a:srgbClr val="94A3B8"/>
+                </a:solidFill>
+              </a:defRPr>
+            </a:pPr>
+            <a:r>
+              <a:t>• Lack of granular lead-time forecasting hinders rapid emergency services deployment.</a:t>
+            </a:r>
+          </a:p>
+          <a:p>
+            <a:pPr>
+              <a:defRPr sz="1100">
+                <a:solidFill>
+                  <a:srgbClr val="94A3B8"/>
+                </a:solidFill>
+              </a:defRPr>
+            </a:pPr>
+            <a:r>
+              <a:t>• High population density zones (up to 42,000/km²) face catastrophic economic and human risks.</a:t>
+            </a:r>
+          </a:p>
+        </p:txBody>
+      </p:sp>
+      <p:sp>
+        <p:nvSpPr>
+          <p:cNvPr id="6" name="Rounded Rectangle 5"/>
+          <p:cNvSpPr/>
+          <p:nvPr/>
+        </p:nvSpPr>
+        <p:spPr>
+          <a:xfrm>
+            <a:off x="6217920" y="1645920"/>
+            <a:ext cx="5212080" cy="4572000"/>
+          </a:xfrm>
+          <a:prstGeom prst="roundRect">
+            <a:avLst/>
+          </a:prstGeom>
+          <a:solidFill>
+            <a:srgbClr val="0C1A2E"/>
+          </a:solidFill>
+          <a:ln w="9525">
+            <a:solidFill>
+              <a:srgbClr val="FFFFFF"/>
+            </a:solidFill>
+          </a:ln>
+        </p:spPr>
+        <p:style>
+          <a:lnRef idx="1">
+            <a:schemeClr val="accent1"/>
+          </a:lnRef>
+          <a:fillRef idx="3">
+            <a:schemeClr val="accent1"/>
+          </a:fillRef>
+          <a:effectRef idx="2">
+            <a:schemeClr val="accent1"/>
+          </a:effectRef>
+          <a:fontRef idx="minor">
+            <a:schemeClr val="lt1"/>
+          </a:fontRef>
+        </p:style>
+        <p:txBody>
+          <a:bodyPr rtlCol="0" anchor="ctr"/>
+          <a:lstStyle/>
+          <a:p>
+            <a:pPr algn="ctr"/>
+          </a:p>
+        </p:txBody>
+      </p:sp>
+      <p:sp>
+        <p:nvSpPr>
+          <p:cNvPr id="7" name="TextBox 6"/>
+          <p:cNvSpPr txBox="1"/>
+          <p:nvPr/>
+        </p:nvSpPr>
+        <p:spPr>
+          <a:xfrm>
+            <a:off x="6446520" y="1828800"/>
+            <a:ext cx="4754880" cy="4206240"/>
+          </a:xfrm>
+          <a:prstGeom prst="rect">
+            <a:avLst/>
+          </a:prstGeom>
+          <a:noFill/>
+        </p:spPr>
+        <p:txBody>
+          <a:bodyPr wrap="square" lIns="0" tIns="0" rIns="0" bIns="0">
+            <a:spAutoFit/>
+          </a:bodyPr>
+          <a:lstStyle/>
+          <a:p>
+            <a:pPr>
+              <a:defRPr sz="1400" b="1">
+                <a:solidFill>
+                  <a:srgbClr val="06B6D4"/>
+                </a:solidFill>
+              </a:defRPr>
+            </a:pPr>
+            <a:r>
+              <a:t>The Project 31 Solution</a:t>
+            </a:r>
+          </a:p>
+          <a:p>
+            <a:pPr>
+              <a:defRPr sz="1100">
+                <a:solidFill>
+                  <a:srgbClr val="94A3B8"/>
+                </a:solidFill>
+              </a:defRPr>
+            </a:pPr>
+            <a:r>
+              <a:t>• Real-time hydro-meteorological sensor telemetry ingesting rainfall, stage level, and storm surge.</a:t>
+            </a:r>
+          </a:p>
+          <a:p>
+            <a:pPr>
+              <a:defRPr sz="1100">
+                <a:solidFill>
+                  <a:srgbClr val="94A3B8"/>
+                </a:solidFill>
+              </a:defRPr>
+            </a:pPr>
+            <a:r>
+              <a:t>• Topographical DEM integration accounting for basin elevation, slope, and soil saturation.</a:t>
+            </a:r>
+          </a:p>
+          <a:p>
+            <a:pPr>
+              <a:defRPr sz="1100">
+                <a:solidFill>
+                  <a:srgbClr val="94A3B8"/>
+                </a:solidFill>
+              </a:defRPr>
+            </a:pPr>
+            <a:r>
+              <a:t>• Dual PyTorch neural networks: 4-tier alert classifier and neural inundation depth regressor.</a:t>
+            </a:r>
+          </a:p>
+          <a:p>
+            <a:pPr>
+              <a:defRPr sz="1100">
+                <a:solidFill>
+                  <a:srgbClr val="94A3B8"/>
+                </a:solidFill>
+              </a:defRPr>
+            </a:pPr>
+            <a:r>
+              <a:t>• Precision evacuation lead-time calculation providing municipal teams 1 to 24 hours warning.</a:t>
+            </a:r>
+          </a:p>
+          <a:p>
+            <a:pPr>
+              <a:defRPr sz="1100">
+                <a:solidFill>
+                  <a:srgbClr val="94A3B8"/>
+                </a:solidFill>
+              </a:defRPr>
+            </a:pPr>
+            <a:r>
+              <a:t>• ACID SQLite persistence with Write-Ahead Logging (WAL) and automated dispatch audit logs.</a:t>
             </a:r>
           </a:p>
         </p:txBody>
@@ -3444,13 +5580,13 @@
         <p:spPr>
           <a:xfrm>
             <a:off x="0" y="0"/>
-            <a:ext cx="12191695" cy="1097280"/>
+            <a:ext cx="12191695" cy="6858000"/>
           </a:xfrm>
           <a:prstGeom prst="rect">
             <a:avLst/>
           </a:prstGeom>
           <a:solidFill>
-            <a:srgbClr val="0F172A"/>
+            <a:srgbClr val="06111E"/>
           </a:solidFill>
           <a:ln>
             <a:noFill/>
@@ -3486,8 +5622,8 @@
         </p:nvSpPr>
         <p:spPr>
           <a:xfrm>
-            <a:off x="731520" y="137160"/>
-            <a:ext cx="10698480" cy="822960"/>
+            <a:off x="731520" y="365760"/>
+            <a:ext cx="10698480" cy="1005840"/>
           </a:xfrm>
           <a:prstGeom prst="rect">
             <a:avLst/>
@@ -3495,46 +5631,91 @@
           <a:noFill/>
         </p:spPr>
         <p:txBody>
-          <a:bodyPr wrap="square">
+          <a:bodyPr wrap="square" lIns="0" tIns="0" rIns="0" bIns="0">
             <a:spAutoFit/>
           </a:bodyPr>
           <a:lstStyle/>
           <a:p>
             <a:pPr>
-              <a:defRPr sz="2400" b="1">
-                <a:solidFill>
-                  <a:srgbClr val="FFFFFF"/>
-                </a:solidFill>
-              </a:defRPr>
-            </a:pPr>
-            <a:r>
-              <a:t>2. Problem Statement &amp; Key Objectives</a:t>
-            </a:r>
-          </a:p>
-          <a:p>
-            <a:pPr>
-              <a:defRPr sz="1100">
-                <a:solidFill>
-                  <a:srgbClr val="94A3B8"/>
-                </a:solidFill>
-              </a:defRPr>
-            </a:pPr>
-            <a:r>
-              <a:t>Academic &amp; Industrial AI Project Series  |  Project 31 of 55</a:t>
-            </a:r>
-          </a:p>
-        </p:txBody>
-      </p:sp>
-      <p:sp>
-        <p:nvSpPr>
-          <p:cNvPr id="4" name="TextBox 3"/>
+              <a:defRPr sz="1000" b="1">
+                <a:solidFill>
+                  <a:srgbClr val="06B6D4"/>
+                </a:solidFill>
+              </a:defRPr>
+            </a:pPr>
+            <a:r>
+              <a:t>PROJECT 31 • HYDROLOGY &amp; GEOSPATIAL INTELLIGENCE</a:t>
+            </a:r>
+          </a:p>
+          <a:p>
+            <a:pPr>
+              <a:defRPr sz="2200" b="1">
+                <a:solidFill>
+                  <a:srgbClr val="F8FAFC"/>
+                </a:solidFill>
+              </a:defRPr>
+            </a:pPr>
+            <a:r>
+              <a:t>Geospatial Hydrology: 5 Monitored River Catchments</a:t>
+            </a:r>
+          </a:p>
+        </p:txBody>
+      </p:sp>
+      <p:sp>
+        <p:nvSpPr>
+          <p:cNvPr id="4" name="Rounded Rectangle 3"/>
+          <p:cNvSpPr/>
+          <p:nvPr/>
+        </p:nvSpPr>
+        <p:spPr>
+          <a:xfrm>
+            <a:off x="731520" y="1645920"/>
+            <a:ext cx="3291840" cy="4572000"/>
+          </a:xfrm>
+          <a:prstGeom prst="roundRect">
+            <a:avLst/>
+          </a:prstGeom>
+          <a:solidFill>
+            <a:srgbClr val="0C1A2E"/>
+          </a:solidFill>
+          <a:ln w="9525">
+            <a:solidFill>
+              <a:srgbClr val="FFFFFF"/>
+            </a:solidFill>
+          </a:ln>
+        </p:spPr>
+        <p:style>
+          <a:lnRef idx="1">
+            <a:schemeClr val="accent1"/>
+          </a:lnRef>
+          <a:fillRef idx="3">
+            <a:schemeClr val="accent1"/>
+          </a:fillRef>
+          <a:effectRef idx="2">
+            <a:schemeClr val="accent1"/>
+          </a:effectRef>
+          <a:fontRef idx="minor">
+            <a:schemeClr val="lt1"/>
+          </a:fontRef>
+        </p:style>
+        <p:txBody>
+          <a:bodyPr rtlCol="0" anchor="ctr"/>
+          <a:lstStyle/>
+          <a:p>
+            <a:pPr algn="ctr"/>
+          </a:p>
+        </p:txBody>
+      </p:sp>
+      <p:sp>
+        <p:nvSpPr>
+          <p:cNvPr id="5" name="TextBox 4"/>
           <p:cNvSpPr txBox="1"/>
           <p:nvPr/>
         </p:nvSpPr>
         <p:spPr>
           <a:xfrm>
-            <a:off x="731520" y="1371600"/>
-            <a:ext cx="10698480" cy="5029200"/>
+            <a:off x="960120" y="1828800"/>
+            <a:ext cx="2834640" cy="4206240"/>
           </a:xfrm>
           <a:prstGeom prst="rect">
             <a:avLst/>
@@ -3542,128 +5723,432 @@
           <a:noFill/>
         </p:spPr>
         <p:txBody>
-          <a:bodyPr wrap="square">
+          <a:bodyPr wrap="square" lIns="0" tIns="0" rIns="0" bIns="0">
             <a:spAutoFit/>
           </a:bodyPr>
           <a:lstStyle/>
           <a:p>
             <a:pPr>
-              <a:spcBef>
-                <a:spcPts val="800"/>
-              </a:spcBef>
-              <a:defRPr sz="1600" b="1">
-                <a:solidFill>
-                  <a:srgbClr val="10B981"/>
-                </a:solidFill>
-              </a:defRPr>
-            </a:pPr>
-            <a:r>
-              <a:t>✓ Predictive Accuracy &amp; Generalization</a:t>
-            </a:r>
-          </a:p>
-          <a:p>
-            <a:pPr>
-              <a:spcBef>
-                <a:spcPts val="200"/>
-              </a:spcBef>
-              <a:defRPr sz="1300">
-                <a:solidFill>
-                  <a:srgbClr val="475569"/>
-                </a:solidFill>
-              </a:defRPr>
-            </a:pPr>
-            <a:r>
-              <a:t>Achieve high validation precision across diverse real-world operating distributions.</a:t>
-            </a:r>
-          </a:p>
-          <a:p>
-            <a:pPr>
-              <a:spcBef>
-                <a:spcPts val="800"/>
-              </a:spcBef>
-              <a:defRPr sz="1600" b="1">
-                <a:solidFill>
-                  <a:srgbClr val="10B981"/>
-                </a:solidFill>
-              </a:defRPr>
-            </a:pPr>
-            <a:r>
-              <a:t>✓ Real-Time Low Latency Inference</a:t>
-            </a:r>
-          </a:p>
-          <a:p>
-            <a:pPr>
-              <a:spcBef>
-                <a:spcPts val="200"/>
-              </a:spcBef>
-              <a:defRPr sz="1300">
-                <a:solidFill>
-                  <a:srgbClr val="475569"/>
-                </a:solidFill>
-              </a:defRPr>
-            </a:pPr>
-            <a:r>
-              <a:t>Deliver end-to-end processing response times under 35 milliseconds per query.</a:t>
-            </a:r>
-          </a:p>
-          <a:p>
-            <a:pPr>
-              <a:spcBef>
-                <a:spcPts val="800"/>
-              </a:spcBef>
-              <a:defRPr sz="1600" b="1">
-                <a:solidFill>
-                  <a:srgbClr val="10B981"/>
-                </a:solidFill>
-              </a:defRPr>
-            </a:pPr>
-            <a:r>
-              <a:t>✓ Robust Anomaly &amp; Boundary Handling</a:t>
-            </a:r>
-          </a:p>
-          <a:p>
-            <a:pPr>
-              <a:spcBef>
-                <a:spcPts val="200"/>
-              </a:spcBef>
-              <a:defRPr sz="1300">
-                <a:solidFill>
-                  <a:srgbClr val="475569"/>
-                </a:solidFill>
-              </a:defRPr>
-            </a:pPr>
-            <a:r>
-              <a:t>Detect out-of-distribution instances and reject anomalous inputs with deterministic alerts.</a:t>
-            </a:r>
-          </a:p>
-          <a:p>
-            <a:pPr>
-              <a:spcBef>
-                <a:spcPts val="800"/>
-              </a:spcBef>
-              <a:defRPr sz="1600" b="1">
-                <a:solidFill>
-                  <a:srgbClr val="10B981"/>
-                </a:solidFill>
-              </a:defRPr>
-            </a:pPr>
-            <a:r>
-              <a:t>✓ Production-Ready Full Stack</a:t>
-            </a:r>
-          </a:p>
-          <a:p>
-            <a:pPr>
-              <a:spcBef>
-                <a:spcPts val="200"/>
-              </a:spcBef>
-              <a:defRPr sz="1300">
-                <a:solidFill>
-                  <a:srgbClr val="475569"/>
-                </a:solidFill>
-              </a:defRPr>
-            </a:pPr>
-            <a:r>
-              <a:t>Provide modular REST APIs, audit logging, and responsive user interfaces.</a:t>
+              <a:defRPr sz="1400" b="1">
+                <a:solidFill>
+                  <a:srgbClr val="06B6D4"/>
+                </a:solidFill>
+              </a:defRPr>
+            </a:pPr>
+            <a:r>
+              <a:t>Lowland Catchments</a:t>
+            </a:r>
+          </a:p>
+          <a:p>
+            <a:pPr>
+              <a:defRPr sz="1100">
+                <a:solidFill>
+                  <a:srgbClr val="94A3B8"/>
+                </a:solidFill>
+              </a:defRPr>
+            </a:pPr>
+            <a:r>
+              <a:t>• Bay Coastal Lowlands (3.2m DEM):</a:t>
+            </a:r>
+          </a:p>
+          <a:p>
+            <a:pPr>
+              <a:defRPr sz="1100">
+                <a:solidFill>
+                  <a:srgbClr val="94A3B8"/>
+                </a:solidFill>
+              </a:defRPr>
+            </a:pPr>
+            <a:r>
+              <a:t>•   - Tidal estuary subject to marine surge.</a:t>
+            </a:r>
+          </a:p>
+          <a:p>
+            <a:pPr>
+              <a:defRPr sz="1100">
+                <a:solidFill>
+                  <a:srgbClr val="94A3B8"/>
+                </a:solidFill>
+              </a:defRPr>
+            </a:pPr>
+            <a:r>
+              <a:t>•   - Flood crest threshold: 4.5m.</a:t>
+            </a:r>
+          </a:p>
+          <a:p>
+            <a:pPr>
+              <a:defRPr sz="1100">
+                <a:solidFill>
+                  <a:srgbClr val="94A3B8"/>
+                </a:solidFill>
+              </a:defRPr>
+            </a:pPr>
+            <a:r>
+              <a:t>•   - Drainage: Low capacity (score 1.0).</a:t>
+            </a:r>
+          </a:p>
+          <a:p>
+            <a:pPr>
+              <a:defRPr sz="1100">
+                <a:solidFill>
+                  <a:srgbClr val="94A3B8"/>
+                </a:solidFill>
+              </a:defRPr>
+            </a:pPr>
+            <a:r>
+              <a:t>•   - Population: 24,000/km².</a:t>
+            </a:r>
+          </a:p>
+          <a:p>
+            <a:pPr>
+              <a:defRPr sz="1100">
+                <a:solidFill>
+                  <a:srgbClr val="94A3B8"/>
+                </a:solidFill>
+              </a:defRPr>
+            </a:pPr>
+            <a:r>
+              <a:t>• Riverside Embankment (6.5m DEM):</a:t>
+            </a:r>
+          </a:p>
+          <a:p>
+            <a:pPr>
+              <a:defRPr sz="1100">
+                <a:solidFill>
+                  <a:srgbClr val="94A3B8"/>
+                </a:solidFill>
+              </a:defRPr>
+            </a:pPr>
+            <a:r>
+              <a:t>•   - Active river flood plain with 6.0m crest limit.</a:t>
+            </a:r>
+          </a:p>
+          <a:p>
+            <a:pPr>
+              <a:defRPr sz="1100">
+                <a:solidFill>
+                  <a:srgbClr val="94A3B8"/>
+                </a:solidFill>
+              </a:defRPr>
+            </a:pPr>
+            <a:r>
+              <a:t>•   - Population: 18,500/km².</a:t>
+            </a:r>
+          </a:p>
+        </p:txBody>
+      </p:sp>
+      <p:sp>
+        <p:nvSpPr>
+          <p:cNvPr id="6" name="Rounded Rectangle 5"/>
+          <p:cNvSpPr/>
+          <p:nvPr/>
+        </p:nvSpPr>
+        <p:spPr>
+          <a:xfrm>
+            <a:off x="4389120" y="1645920"/>
+            <a:ext cx="3291840" cy="4572000"/>
+          </a:xfrm>
+          <a:prstGeom prst="roundRect">
+            <a:avLst/>
+          </a:prstGeom>
+          <a:solidFill>
+            <a:srgbClr val="0C1A2E"/>
+          </a:solidFill>
+          <a:ln w="9525">
+            <a:solidFill>
+              <a:srgbClr val="FFFFFF"/>
+            </a:solidFill>
+          </a:ln>
+        </p:spPr>
+        <p:style>
+          <a:lnRef idx="1">
+            <a:schemeClr val="accent1"/>
+          </a:lnRef>
+          <a:fillRef idx="3">
+            <a:schemeClr val="accent1"/>
+          </a:fillRef>
+          <a:effectRef idx="2">
+            <a:schemeClr val="accent1"/>
+          </a:effectRef>
+          <a:fontRef idx="minor">
+            <a:schemeClr val="lt1"/>
+          </a:fontRef>
+        </p:style>
+        <p:txBody>
+          <a:bodyPr rtlCol="0" anchor="ctr"/>
+          <a:lstStyle/>
+          <a:p>
+            <a:pPr algn="ctr"/>
+          </a:p>
+        </p:txBody>
+      </p:sp>
+      <p:sp>
+        <p:nvSpPr>
+          <p:cNvPr id="7" name="TextBox 6"/>
+          <p:cNvSpPr txBox="1"/>
+          <p:nvPr/>
+        </p:nvSpPr>
+        <p:spPr>
+          <a:xfrm>
+            <a:off x="4617720" y="1828800"/>
+            <a:ext cx="2834640" cy="4206240"/>
+          </a:xfrm>
+          <a:prstGeom prst="rect">
+            <a:avLst/>
+          </a:prstGeom>
+          <a:noFill/>
+        </p:spPr>
+        <p:txBody>
+          <a:bodyPr wrap="square" lIns="0" tIns="0" rIns="0" bIns="0">
+            <a:spAutoFit/>
+          </a:bodyPr>
+          <a:lstStyle/>
+          <a:p>
+            <a:pPr>
+              <a:defRPr sz="1400" b="1">
+                <a:solidFill>
+                  <a:srgbClr val="06B6D4"/>
+                </a:solidFill>
+              </a:defRPr>
+            </a:pPr>
+            <a:r>
+              <a:t>Metropolitan Catchments</a:t>
+            </a:r>
+          </a:p>
+          <a:p>
+            <a:pPr>
+              <a:defRPr sz="1100">
+                <a:solidFill>
+                  <a:srgbClr val="94A3B8"/>
+                </a:solidFill>
+              </a:defRPr>
+            </a:pPr>
+            <a:r>
+              <a:t>• Downtown Core (14.0m DEM):</a:t>
+            </a:r>
+          </a:p>
+          <a:p>
+            <a:pPr>
+              <a:defRPr sz="1100">
+                <a:solidFill>
+                  <a:srgbClr val="94A3B8"/>
+                </a:solidFill>
+              </a:defRPr>
+            </a:pPr>
+            <a:r>
+              <a:t>•   - Concrete urban canyon basin.</a:t>
+            </a:r>
+          </a:p>
+          <a:p>
+            <a:pPr>
+              <a:defRPr sz="1100">
+                <a:solidFill>
+                  <a:srgbClr val="94A3B8"/>
+                </a:solidFill>
+              </a:defRPr>
+            </a:pPr>
+            <a:r>
+              <a:t>•   - Flood crest threshold: 8.5m.</a:t>
+            </a:r>
+          </a:p>
+          <a:p>
+            <a:pPr>
+              <a:defRPr sz="1100">
+                <a:solidFill>
+                  <a:srgbClr val="94A3B8"/>
+                </a:solidFill>
+              </a:defRPr>
+            </a:pPr>
+            <a:r>
+              <a:t>•   - Drainage: High capacity pump arrays (score 3.0).</a:t>
+            </a:r>
+          </a:p>
+          <a:p>
+            <a:pPr>
+              <a:defRPr sz="1100">
+                <a:solidFill>
+                  <a:srgbClr val="94A3B8"/>
+                </a:solidFill>
+              </a:defRPr>
+            </a:pPr>
+            <a:r>
+              <a:t>•   - Population: 42,000/km².</a:t>
+            </a:r>
+          </a:p>
+          <a:p>
+            <a:pPr>
+              <a:defRPr sz="1100">
+                <a:solidFill>
+                  <a:srgbClr val="94A3B8"/>
+                </a:solidFill>
+              </a:defRPr>
+            </a:pPr>
+            <a:r>
+              <a:t>• Industrial Valley (11.0m DEM):</a:t>
+            </a:r>
+          </a:p>
+          <a:p>
+            <a:pPr>
+              <a:defRPr sz="1100">
+                <a:solidFill>
+                  <a:srgbClr val="94A3B8"/>
+                </a:solidFill>
+              </a:defRPr>
+            </a:pPr>
+            <a:r>
+              <a:t>•   - Alluvial manufacturing zone (7.0m threshold).</a:t>
+            </a:r>
+          </a:p>
+        </p:txBody>
+      </p:sp>
+      <p:sp>
+        <p:nvSpPr>
+          <p:cNvPr id="8" name="Rounded Rectangle 7"/>
+          <p:cNvSpPr/>
+          <p:nvPr/>
+        </p:nvSpPr>
+        <p:spPr>
+          <a:xfrm>
+            <a:off x="8046720" y="1645920"/>
+            <a:ext cx="3383280" cy="4572000"/>
+          </a:xfrm>
+          <a:prstGeom prst="roundRect">
+            <a:avLst/>
+          </a:prstGeom>
+          <a:solidFill>
+            <a:srgbClr val="0C1A2E"/>
+          </a:solidFill>
+          <a:ln w="9525">
+            <a:solidFill>
+              <a:srgbClr val="FFFFFF"/>
+            </a:solidFill>
+          </a:ln>
+        </p:spPr>
+        <p:style>
+          <a:lnRef idx="1">
+            <a:schemeClr val="accent1"/>
+          </a:lnRef>
+          <a:fillRef idx="3">
+            <a:schemeClr val="accent1"/>
+          </a:fillRef>
+          <a:effectRef idx="2">
+            <a:schemeClr val="accent1"/>
+          </a:effectRef>
+          <a:fontRef idx="minor">
+            <a:schemeClr val="lt1"/>
+          </a:fontRef>
+        </p:style>
+        <p:txBody>
+          <a:bodyPr rtlCol="0" anchor="ctr"/>
+          <a:lstStyle/>
+          <a:p>
+            <a:pPr algn="ctr"/>
+          </a:p>
+        </p:txBody>
+      </p:sp>
+      <p:sp>
+        <p:nvSpPr>
+          <p:cNvPr id="9" name="TextBox 8"/>
+          <p:cNvSpPr txBox="1"/>
+          <p:nvPr/>
+        </p:nvSpPr>
+        <p:spPr>
+          <a:xfrm>
+            <a:off x="8275320" y="1828800"/>
+            <a:ext cx="2926080" cy="4206240"/>
+          </a:xfrm>
+          <a:prstGeom prst="rect">
+            <a:avLst/>
+          </a:prstGeom>
+          <a:noFill/>
+        </p:spPr>
+        <p:txBody>
+          <a:bodyPr wrap="square" lIns="0" tIns="0" rIns="0" bIns="0">
+            <a:spAutoFit/>
+          </a:bodyPr>
+          <a:lstStyle/>
+          <a:p>
+            <a:pPr>
+              <a:defRPr sz="1400" b="1">
+                <a:solidFill>
+                  <a:srgbClr val="06B6D4"/>
+                </a:solidFill>
+              </a:defRPr>
+            </a:pPr>
+            <a:r>
+              <a:t>Highland Buffer</a:t>
+            </a:r>
+          </a:p>
+          <a:p>
+            <a:pPr>
+              <a:defRPr sz="1100">
+                <a:solidFill>
+                  <a:srgbClr val="94A3B8"/>
+                </a:solidFill>
+              </a:defRPr>
+            </a:pPr>
+            <a:r>
+              <a:t>• Upland Ridge Buffer (85.0m DEM):</a:t>
+            </a:r>
+          </a:p>
+          <a:p>
+            <a:pPr>
+              <a:defRPr sz="1100">
+                <a:solidFill>
+                  <a:srgbClr val="94A3B8"/>
+                </a:solidFill>
+              </a:defRPr>
+            </a:pPr>
+            <a:r>
+              <a:t>•   - Natural highland drainage plateau.</a:t>
+            </a:r>
+          </a:p>
+          <a:p>
+            <a:pPr>
+              <a:defRPr sz="1100">
+                <a:solidFill>
+                  <a:srgbClr val="94A3B8"/>
+                </a:solidFill>
+              </a:defRPr>
+            </a:pPr>
+            <a:r>
+              <a:t>•   - Deep channel threshold: 14.0m.</a:t>
+            </a:r>
+          </a:p>
+          <a:p>
+            <a:pPr>
+              <a:defRPr sz="1100">
+                <a:solidFill>
+                  <a:srgbClr val="94A3B8"/>
+                </a:solidFill>
+              </a:defRPr>
+            </a:pPr>
+            <a:r>
+              <a:t>•   - Drainage: Optimal natural gravity run-off.</a:t>
+            </a:r>
+          </a:p>
+          <a:p>
+            <a:pPr>
+              <a:defRPr sz="1100">
+                <a:solidFill>
+                  <a:srgbClr val="94A3B8"/>
+                </a:solidFill>
+              </a:defRPr>
+            </a:pPr>
+            <a:r>
+              <a:t>•   - Serves as baseline control and safe evacuation refuge zone.</a:t>
+            </a:r>
+          </a:p>
+          <a:p>
+            <a:pPr>
+              <a:defRPr sz="1100">
+                <a:solidFill>
+                  <a:srgbClr val="94A3B8"/>
+                </a:solidFill>
+              </a:defRPr>
+            </a:pPr>
+            <a:r>
+              <a:t>•   - System maintains real-time physical telemetry balance.</a:t>
             </a:r>
           </a:p>
         </p:txBody>
@@ -3695,13 +6180,13 @@
         <p:spPr>
           <a:xfrm>
             <a:off x="0" y="0"/>
-            <a:ext cx="12191695" cy="1097280"/>
+            <a:ext cx="12191695" cy="6858000"/>
           </a:xfrm>
           <a:prstGeom prst="rect">
             <a:avLst/>
           </a:prstGeom>
           <a:solidFill>
-            <a:srgbClr val="0F172A"/>
+            <a:srgbClr val="06111E"/>
           </a:solidFill>
           <a:ln>
             <a:noFill/>
@@ -3737,8 +6222,8 @@
         </p:nvSpPr>
         <p:spPr>
           <a:xfrm>
-            <a:off x="731520" y="137160"/>
-            <a:ext cx="10698480" cy="822960"/>
+            <a:off x="731520" y="365760"/>
+            <a:ext cx="10698480" cy="1005840"/>
           </a:xfrm>
           <a:prstGeom prst="rect">
             <a:avLst/>
@@ -3746,46 +6231,91 @@
           <a:noFill/>
         </p:spPr>
         <p:txBody>
-          <a:bodyPr wrap="square">
+          <a:bodyPr wrap="square" lIns="0" tIns="0" rIns="0" bIns="0">
             <a:spAutoFit/>
           </a:bodyPr>
           <a:lstStyle/>
           <a:p>
             <a:pPr>
-              <a:defRPr sz="2400" b="1">
-                <a:solidFill>
-                  <a:srgbClr val="FFFFFF"/>
-                </a:solidFill>
-              </a:defRPr>
-            </a:pPr>
-            <a:r>
-              <a:t>3. System Architecture &amp; Workflow Pipeline</a:t>
-            </a:r>
-          </a:p>
-          <a:p>
-            <a:pPr>
-              <a:defRPr sz="1100">
-                <a:solidFill>
-                  <a:srgbClr val="94A3B8"/>
-                </a:solidFill>
-              </a:defRPr>
-            </a:pPr>
-            <a:r>
-              <a:t>Academic &amp; Industrial AI Project Series  |  Project 31 of 55</a:t>
-            </a:r>
-          </a:p>
-        </p:txBody>
-      </p:sp>
-      <p:sp>
-        <p:nvSpPr>
-          <p:cNvPr id="4" name="TextBox 3"/>
+              <a:defRPr sz="1000" b="1">
+                <a:solidFill>
+                  <a:srgbClr val="06B6D4"/>
+                </a:solidFill>
+              </a:defRPr>
+            </a:pPr>
+            <a:r>
+              <a:t>PROJECT 31 • HYDROLOGY &amp; GEOSPATIAL INTELLIGENCE</a:t>
+            </a:r>
+          </a:p>
+          <a:p>
+            <a:pPr>
+              <a:defRPr sz="2200" b="1">
+                <a:solidFill>
+                  <a:srgbClr val="F8FAFC"/>
+                </a:solidFill>
+              </a:defRPr>
+            </a:pPr>
+            <a:r>
+              <a:t>Hydrological Telemetry Dataset (5,800 Catchment Records)</a:t>
+            </a:r>
+          </a:p>
+        </p:txBody>
+      </p:sp>
+      <p:sp>
+        <p:nvSpPr>
+          <p:cNvPr id="4" name="Rounded Rectangle 3"/>
+          <p:cNvSpPr/>
+          <p:nvPr/>
+        </p:nvSpPr>
+        <p:spPr>
+          <a:xfrm>
+            <a:off x="731520" y="1645920"/>
+            <a:ext cx="5120640" cy="4572000"/>
+          </a:xfrm>
+          <a:prstGeom prst="roundRect">
+            <a:avLst/>
+          </a:prstGeom>
+          <a:solidFill>
+            <a:srgbClr val="0C1A2E"/>
+          </a:solidFill>
+          <a:ln w="9525">
+            <a:solidFill>
+              <a:srgbClr val="FFFFFF"/>
+            </a:solidFill>
+          </a:ln>
+        </p:spPr>
+        <p:style>
+          <a:lnRef idx="1">
+            <a:schemeClr val="accent1"/>
+          </a:lnRef>
+          <a:fillRef idx="3">
+            <a:schemeClr val="accent1"/>
+          </a:fillRef>
+          <a:effectRef idx="2">
+            <a:schemeClr val="accent1"/>
+          </a:effectRef>
+          <a:fontRef idx="minor">
+            <a:schemeClr val="lt1"/>
+          </a:fontRef>
+        </p:style>
+        <p:txBody>
+          <a:bodyPr rtlCol="0" anchor="ctr"/>
+          <a:lstStyle/>
+          <a:p>
+            <a:pPr algn="ctr"/>
+          </a:p>
+        </p:txBody>
+      </p:sp>
+      <p:sp>
+        <p:nvSpPr>
+          <p:cNvPr id="5" name="TextBox 4"/>
           <p:cNvSpPr txBox="1"/>
           <p:nvPr/>
         </p:nvSpPr>
         <p:spPr>
           <a:xfrm>
-            <a:off x="731520" y="1371600"/>
-            <a:ext cx="10698480" cy="5029200"/>
+            <a:off x="960120" y="1828800"/>
+            <a:ext cx="4663440" cy="4206240"/>
           </a:xfrm>
           <a:prstGeom prst="rect">
             <a:avLst/>
@@ -3793,143 +6323,268 @@
           <a:noFill/>
         </p:spPr>
         <p:txBody>
-          <a:bodyPr wrap="square">
+          <a:bodyPr wrap="square" lIns="0" tIns="0" rIns="0" bIns="0">
             <a:spAutoFit/>
           </a:bodyPr>
           <a:lstStyle/>
           <a:p>
             <a:pPr>
-              <a:spcBef>
-                <a:spcPts val="800"/>
-              </a:spcBef>
-              <a:defRPr sz="1500" b="1">
-                <a:solidFill>
-                  <a:srgbClr val="2563EB"/>
-                </a:solidFill>
-              </a:defRPr>
-            </a:pPr>
-            <a:r>
-              <a:t>[1] Ingestion Layer</a:t>
-            </a:r>
-          </a:p>
-          <a:p>
-            <a:pPr>
-              <a:defRPr sz="1300">
-                <a:solidFill>
-                  <a:srgbClr val="475569"/>
-                </a:solidFill>
-              </a:defRPr>
-            </a:pPr>
-            <a:r>
-              <a:t>Raw telemetry, video feeds, or structured tabular features ingested via secure endpoints.</a:t>
-            </a:r>
-          </a:p>
-          <a:p>
-            <a:pPr>
-              <a:spcBef>
-                <a:spcPts val="800"/>
-              </a:spcBef>
-              <a:defRPr sz="1500" b="1">
-                <a:solidFill>
-                  <a:srgbClr val="2563EB"/>
-                </a:solidFill>
-              </a:defRPr>
-            </a:pPr>
-            <a:r>
-              <a:t>[2] Preprocessing &amp; Normalization</a:t>
-            </a:r>
-          </a:p>
-          <a:p>
-            <a:pPr>
-              <a:defRPr sz="1300">
-                <a:solidFill>
-                  <a:srgbClr val="475569"/>
-                </a:solidFill>
-              </a:defRPr>
-            </a:pPr>
-            <a:r>
-              <a:t>Feature scaling, missing value imputation, winsorization, and tensor reshaping.</a:t>
-            </a:r>
-          </a:p>
-          <a:p>
-            <a:pPr>
-              <a:spcBef>
-                <a:spcPts val="800"/>
-              </a:spcBef>
-              <a:defRPr sz="1500" b="1">
-                <a:solidFill>
-                  <a:srgbClr val="2563EB"/>
-                </a:solidFill>
-              </a:defRPr>
-            </a:pPr>
-            <a:r>
-              <a:t>[3] Deep Neural Inference Engine</a:t>
-            </a:r>
-          </a:p>
-          <a:p>
-            <a:pPr>
-              <a:defRPr sz="1300">
-                <a:solidFill>
-                  <a:srgbClr val="475569"/>
-                </a:solidFill>
-              </a:defRPr>
-            </a:pPr>
-            <a:r>
-              <a:t>Optimized model evaluating representations with GPU/MPS/CPU acceleration.</a:t>
-            </a:r>
-          </a:p>
-          <a:p>
-            <a:pPr>
-              <a:spcBef>
-                <a:spcPts val="800"/>
-              </a:spcBef>
-              <a:defRPr sz="1500" b="1">
-                <a:solidFill>
-                  <a:srgbClr val="2563EB"/>
-                </a:solidFill>
-              </a:defRPr>
-            </a:pPr>
-            <a:r>
-              <a:t>[4] Post-Processing &amp; Decision Support</a:t>
-            </a:r>
-          </a:p>
-          <a:p>
-            <a:pPr>
-              <a:defRPr sz="1300">
-                <a:solidFill>
-                  <a:srgbClr val="475569"/>
-                </a:solidFill>
-              </a:defRPr>
-            </a:pPr>
-            <a:r>
-              <a:t>Threshold calibration, confidence scoring, classification/regression output formatting.</a:t>
-            </a:r>
-          </a:p>
-          <a:p>
-            <a:pPr>
-              <a:spcBef>
-                <a:spcPts val="800"/>
-              </a:spcBef>
-              <a:defRPr sz="1500" b="1">
-                <a:solidFill>
-                  <a:srgbClr val="2563EB"/>
-                </a:solidFill>
-              </a:defRPr>
-            </a:pPr>
-            <a:r>
-              <a:t>[5] Visualization &amp; Persistence</a:t>
-            </a:r>
-          </a:p>
-          <a:p>
-            <a:pPr>
-              <a:defRPr sz="1300">
-                <a:solidFill>
-                  <a:srgbClr val="475569"/>
-                </a:solidFill>
-              </a:defRPr>
-            </a:pPr>
-            <a:r>
-              <a:t>Interactive UI dashboard rendering metrics and SQLite/PostgreSQL audit logging.</a:t>
+              <a:defRPr sz="1400" b="1">
+                <a:solidFill>
+                  <a:srgbClr val="06B6D4"/>
+                </a:solidFill>
+              </a:defRPr>
+            </a:pPr>
+            <a:r>
+              <a:t>8 Normalized Feature Dimensions</a:t>
+            </a:r>
+          </a:p>
+          <a:p>
+            <a:pPr>
+              <a:defRPr sz="1100">
+                <a:solidFill>
+                  <a:srgbClr val="94A3B8"/>
+                </a:solidFill>
+              </a:defRPr>
+            </a:pPr>
+            <a:r>
+              <a:t>• Rainfall Intensity: 2.0 to 290.0 mm cumulative storm precipitation.</a:t>
+            </a:r>
+          </a:p>
+          <a:p>
+            <a:pPr>
+              <a:defRPr sz="1100">
+                <a:solidFill>
+                  <a:srgbClr val="94A3B8"/>
+                </a:solidFill>
+              </a:defRPr>
+            </a:pPr>
+            <a:r>
+              <a:t>• River Stage Level: 1.2m to 16.0m continuous gauge level.</a:t>
+            </a:r>
+          </a:p>
+          <a:p>
+            <a:pPr>
+              <a:defRPr sz="1100">
+                <a:solidFill>
+                  <a:srgbClr val="94A3B8"/>
+                </a:solidFill>
+              </a:defRPr>
+            </a:pPr>
+            <a:r>
+              <a:t>• River Threshold: 4.5m to 14.0m bankfull flood crest capacity.</a:t>
+            </a:r>
+          </a:p>
+          <a:p>
+            <a:pPr>
+              <a:defRPr sz="1100">
+                <a:solidFill>
+                  <a:srgbClr val="94A3B8"/>
+                </a:solidFill>
+              </a:defRPr>
+            </a:pPr>
+            <a:r>
+              <a:t>• Soil Moisture Saturation: 20% to 100% moisture saturation ratio.</a:t>
+            </a:r>
+          </a:p>
+          <a:p>
+            <a:pPr>
+              <a:defRPr sz="1100">
+                <a:solidFill>
+                  <a:srgbClr val="94A3B8"/>
+                </a:solidFill>
+              </a:defRPr>
+            </a:pPr>
+            <a:r>
+              <a:t>• Storm Surge: 0.0m to 3.2m tidal and marine push.</a:t>
+            </a:r>
+          </a:p>
+          <a:p>
+            <a:pPr>
+              <a:defRPr sz="1100">
+                <a:solidFill>
+                  <a:srgbClr val="94A3B8"/>
+                </a:solidFill>
+              </a:defRPr>
+            </a:pPr>
+            <a:r>
+              <a:t>• DEM Elevation: 3.2m to 85.0m topographic terrain contour.</a:t>
+            </a:r>
+          </a:p>
+          <a:p>
+            <a:pPr>
+              <a:defRPr sz="1100">
+                <a:solidFill>
+                  <a:srgbClr val="94A3B8"/>
+                </a:solidFill>
+              </a:defRPr>
+            </a:pPr>
+            <a:r>
+              <a:t>• Drainage Capacity Score: 1.0 (Low) to 4.0 (Optimal).</a:t>
+            </a:r>
+          </a:p>
+          <a:p>
+            <a:pPr>
+              <a:defRPr sz="1100">
+                <a:solidFill>
+                  <a:srgbClr val="94A3B8"/>
+                </a:solidFill>
+              </a:defRPr>
+            </a:pPr>
+            <a:r>
+              <a:t>• Crest Exceedance Ratio: river_stage / threshold (normalized).</a:t>
+            </a:r>
+          </a:p>
+        </p:txBody>
+      </p:sp>
+      <p:sp>
+        <p:nvSpPr>
+          <p:cNvPr id="6" name="Rounded Rectangle 5"/>
+          <p:cNvSpPr/>
+          <p:nvPr/>
+        </p:nvSpPr>
+        <p:spPr>
+          <a:xfrm>
+            <a:off x="6217920" y="1645920"/>
+            <a:ext cx="5212080" cy="4572000"/>
+          </a:xfrm>
+          <a:prstGeom prst="roundRect">
+            <a:avLst/>
+          </a:prstGeom>
+          <a:solidFill>
+            <a:srgbClr val="0C1A2E"/>
+          </a:solidFill>
+          <a:ln w="9525">
+            <a:solidFill>
+              <a:srgbClr val="FFFFFF"/>
+            </a:solidFill>
+          </a:ln>
+        </p:spPr>
+        <p:style>
+          <a:lnRef idx="1">
+            <a:schemeClr val="accent1"/>
+          </a:lnRef>
+          <a:fillRef idx="3">
+            <a:schemeClr val="accent1"/>
+          </a:fillRef>
+          <a:effectRef idx="2">
+            <a:schemeClr val="accent1"/>
+          </a:effectRef>
+          <a:fontRef idx="minor">
+            <a:schemeClr val="lt1"/>
+          </a:fontRef>
+        </p:style>
+        <p:txBody>
+          <a:bodyPr rtlCol="0" anchor="ctr"/>
+          <a:lstStyle/>
+          <a:p>
+            <a:pPr algn="ctr"/>
+          </a:p>
+        </p:txBody>
+      </p:sp>
+      <p:sp>
+        <p:nvSpPr>
+          <p:cNvPr id="7" name="TextBox 6"/>
+          <p:cNvSpPr txBox="1"/>
+          <p:nvPr/>
+        </p:nvSpPr>
+        <p:spPr>
+          <a:xfrm>
+            <a:off x="6446520" y="1828800"/>
+            <a:ext cx="4754880" cy="4206240"/>
+          </a:xfrm>
+          <a:prstGeom prst="rect">
+            <a:avLst/>
+          </a:prstGeom>
+          <a:noFill/>
+        </p:spPr>
+        <p:txBody>
+          <a:bodyPr wrap="square" lIns="0" tIns="0" rIns="0" bIns="0">
+            <a:spAutoFit/>
+          </a:bodyPr>
+          <a:lstStyle/>
+          <a:p>
+            <a:pPr>
+              <a:defRPr sz="1400" b="1">
+                <a:solidFill>
+                  <a:srgbClr val="06B6D4"/>
+                </a:solidFill>
+              </a:defRPr>
+            </a:pPr>
+            <a:r>
+              <a:t>Dataset Stratification &amp; Scenarios</a:t>
+            </a:r>
+          </a:p>
+          <a:p>
+            <a:pPr>
+              <a:defRPr sz="1100">
+                <a:solidFill>
+                  <a:srgbClr val="94A3B8"/>
+                </a:solidFill>
+              </a:defRPr>
+            </a:pPr>
+            <a:r>
+              <a:t>• Benign Weather (35%): Equilibrium rainfall, stable water tables.</a:t>
+            </a:r>
+          </a:p>
+          <a:p>
+            <a:pPr>
+              <a:defRPr sz="1100">
+                <a:solidFill>
+                  <a:srgbClr val="94A3B8"/>
+                </a:solidFill>
+              </a:defRPr>
+            </a:pPr>
+            <a:r>
+              <a:t>• Moderate Inflow (30%): Elevated runoff, drainage operating within limits.</a:t>
+            </a:r>
+          </a:p>
+          <a:p>
+            <a:pPr>
+              <a:defRPr sz="1100">
+                <a:solidFill>
+                  <a:srgbClr val="94A3B8"/>
+                </a:solidFill>
+              </a:defRPr>
+            </a:pPr>
+            <a:r>
+              <a:t>• Intense Storm Front (23%): Flash flood watch, localized pooling.</a:t>
+            </a:r>
+          </a:p>
+          <a:p>
+            <a:pPr>
+              <a:defRPr sz="1100">
+                <a:solidFill>
+                  <a:srgbClr val="94A3B8"/>
+                </a:solidFill>
+              </a:defRPr>
+            </a:pPr>
+            <a:r>
+              <a:t>• Catastrophic Deluge (12%): Severe river crest overtopping &amp; estuary surge.</a:t>
+            </a:r>
+          </a:p>
+          <a:p>
+            <a:pPr>
+              <a:defRPr sz="1100">
+                <a:solidFill>
+                  <a:srgbClr val="94A3B8"/>
+                </a:solidFill>
+              </a:defRPr>
+            </a:pPr>
+            <a:r>
+              <a:t>• Serialized to 637 KB CSV (5,800 records) and structured JSON.</a:t>
+            </a:r>
+          </a:p>
+          <a:p>
+            <a:pPr>
+              <a:defRPr sz="1100">
+                <a:solidFill>
+                  <a:srgbClr val="94A3B8"/>
+                </a:solidFill>
+              </a:defRPr>
+            </a:pPr>
+            <a:r>
+              <a:t>• Standardized using z-score normalization (hydro_scalers.json).</a:t>
             </a:r>
           </a:p>
         </p:txBody>
@@ -3961,13 +6616,13 @@
         <p:spPr>
           <a:xfrm>
             <a:off x="0" y="0"/>
-            <a:ext cx="12191695" cy="1097280"/>
+            <a:ext cx="12191695" cy="6858000"/>
           </a:xfrm>
           <a:prstGeom prst="rect">
             <a:avLst/>
           </a:prstGeom>
           <a:solidFill>
-            <a:srgbClr val="0F172A"/>
+            <a:srgbClr val="06111E"/>
           </a:solidFill>
           <a:ln>
             <a:noFill/>
@@ -4003,8 +6658,8 @@
         </p:nvSpPr>
         <p:spPr>
           <a:xfrm>
-            <a:off x="731520" y="137160"/>
-            <a:ext cx="10698480" cy="822960"/>
+            <a:off x="731520" y="365760"/>
+            <a:ext cx="10698480" cy="1005840"/>
           </a:xfrm>
           <a:prstGeom prst="rect">
             <a:avLst/>
@@ -4012,46 +6667,91 @@
           <a:noFill/>
         </p:spPr>
         <p:txBody>
-          <a:bodyPr wrap="square">
+          <a:bodyPr wrap="square" lIns="0" tIns="0" rIns="0" bIns="0">
             <a:spAutoFit/>
           </a:bodyPr>
           <a:lstStyle/>
           <a:p>
             <a:pPr>
-              <a:defRPr sz="2400" b="1">
-                <a:solidFill>
-                  <a:srgbClr val="FFFFFF"/>
-                </a:solidFill>
-              </a:defRPr>
-            </a:pPr>
-            <a:r>
-              <a:t>4. Deep Learning &amp; ML Methodology</a:t>
-            </a:r>
-          </a:p>
-          <a:p>
-            <a:pPr>
-              <a:defRPr sz="1100">
-                <a:solidFill>
-                  <a:srgbClr val="94A3B8"/>
-                </a:solidFill>
-              </a:defRPr>
-            </a:pPr>
-            <a:r>
-              <a:t>Academic &amp; Industrial AI Project Series  |  Project 31 of 55</a:t>
-            </a:r>
-          </a:p>
-        </p:txBody>
-      </p:sp>
-      <p:sp>
-        <p:nvSpPr>
-          <p:cNvPr id="4" name="TextBox 3"/>
+              <a:defRPr sz="1000" b="1">
+                <a:solidFill>
+                  <a:srgbClr val="06B6D4"/>
+                </a:solidFill>
+              </a:defRPr>
+            </a:pPr>
+            <a:r>
+              <a:t>PROJECT 31 • HYDROLOGY &amp; GEOSPATIAL INTELLIGENCE</a:t>
+            </a:r>
+          </a:p>
+          <a:p>
+            <a:pPr>
+              <a:defRPr sz="2200" b="1">
+                <a:solidFill>
+                  <a:srgbClr val="F8FAFC"/>
+                </a:solidFill>
+              </a:defRPr>
+            </a:pPr>
+            <a:r>
+              <a:t>Dual PyTorch Architecture: Residual FloodNet &amp; Inundation Regressor</a:t>
+            </a:r>
+          </a:p>
+        </p:txBody>
+      </p:sp>
+      <p:sp>
+        <p:nvSpPr>
+          <p:cNvPr id="4" name="Rounded Rectangle 3"/>
+          <p:cNvSpPr/>
+          <p:nvPr/>
+        </p:nvSpPr>
+        <p:spPr>
+          <a:xfrm>
+            <a:off x="731520" y="1645920"/>
+            <a:ext cx="5120640" cy="4572000"/>
+          </a:xfrm>
+          <a:prstGeom prst="roundRect">
+            <a:avLst/>
+          </a:prstGeom>
+          <a:solidFill>
+            <a:srgbClr val="0C1A2E"/>
+          </a:solidFill>
+          <a:ln w="9525">
+            <a:solidFill>
+              <a:srgbClr val="FFFFFF"/>
+            </a:solidFill>
+          </a:ln>
+        </p:spPr>
+        <p:style>
+          <a:lnRef idx="1">
+            <a:schemeClr val="accent1"/>
+          </a:lnRef>
+          <a:fillRef idx="3">
+            <a:schemeClr val="accent1"/>
+          </a:fillRef>
+          <a:effectRef idx="2">
+            <a:schemeClr val="accent1"/>
+          </a:effectRef>
+          <a:fontRef idx="minor">
+            <a:schemeClr val="lt1"/>
+          </a:fontRef>
+        </p:style>
+        <p:txBody>
+          <a:bodyPr rtlCol="0" anchor="ctr"/>
+          <a:lstStyle/>
+          <a:p>
+            <a:pPr algn="ctr"/>
+          </a:p>
+        </p:txBody>
+      </p:sp>
+      <p:sp>
+        <p:nvSpPr>
+          <p:cNvPr id="5" name="TextBox 4"/>
           <p:cNvSpPr txBox="1"/>
           <p:nvPr/>
         </p:nvSpPr>
         <p:spPr>
           <a:xfrm>
-            <a:off x="731520" y="1371600"/>
-            <a:ext cx="10698480" cy="5029200"/>
+            <a:off x="960120" y="1828800"/>
+            <a:ext cx="4663440" cy="4206240"/>
           </a:xfrm>
           <a:prstGeom prst="rect">
             <a:avLst/>
@@ -4059,116 +6759,244 @@
           <a:noFill/>
         </p:spPr>
         <p:txBody>
-          <a:bodyPr wrap="square">
+          <a:bodyPr wrap="square" lIns="0" tIns="0" rIns="0" bIns="0">
             <a:spAutoFit/>
           </a:bodyPr>
           <a:lstStyle/>
           <a:p>
             <a:pPr>
-              <a:spcBef>
-                <a:spcPts val="800"/>
-              </a:spcBef>
-              <a:defRPr sz="1500" b="1">
-                <a:solidFill>
-                  <a:srgbClr val="0F172A"/>
-                </a:solidFill>
-              </a:defRPr>
-            </a:pPr>
-            <a:r>
-              <a:t>• Feature Engineering &amp; Dimensionality Alignment</a:t>
-            </a:r>
-          </a:p>
-          <a:p>
-            <a:pPr>
-              <a:defRPr sz="1300">
-                <a:solidFill>
-                  <a:srgbClr val="475569"/>
-                </a:solidFill>
-              </a:defRPr>
-            </a:pPr>
-            <a:r>
-              <a:t>Domain-specific feature extraction, temporal windowing, and embedding vectors.</a:t>
-            </a:r>
-          </a:p>
-          <a:p>
-            <a:pPr>
-              <a:spcBef>
-                <a:spcPts val="800"/>
-              </a:spcBef>
-              <a:defRPr sz="1500" b="1">
-                <a:solidFill>
-                  <a:srgbClr val="0F172A"/>
-                </a:solidFill>
-              </a:defRPr>
-            </a:pPr>
-            <a:r>
-              <a:t>• Model Family &amp; Optimization</a:t>
-            </a:r>
-          </a:p>
-          <a:p>
-            <a:pPr>
-              <a:defRPr sz="1300">
-                <a:solidFill>
-                  <a:srgbClr val="475569"/>
-                </a:solidFill>
-              </a:defRPr>
-            </a:pPr>
-            <a:r>
-              <a:t>Ensemble gradient boosting or deep neural networks trained with AdamW and adaptive LR scheduling.</a:t>
-            </a:r>
-          </a:p>
-          <a:p>
-            <a:pPr>
-              <a:spcBef>
-                <a:spcPts val="800"/>
-              </a:spcBef>
-              <a:defRPr sz="1500" b="1">
-                <a:solidFill>
-                  <a:srgbClr val="0F172A"/>
-                </a:solidFill>
-              </a:defRPr>
-            </a:pPr>
-            <a:r>
-              <a:t>• Overfitting Mitigation</a:t>
-            </a:r>
-          </a:p>
-          <a:p>
-            <a:pPr>
-              <a:defRPr sz="1300">
-                <a:solidFill>
-                  <a:srgbClr val="475569"/>
-                </a:solidFill>
-              </a:defRPr>
-            </a:pPr>
-            <a:r>
-              <a:t>Stratified k-fold cross-validation, dropout layers, early stopping, and data augmentation.</a:t>
-            </a:r>
-          </a:p>
-          <a:p>
-            <a:pPr>
-              <a:spcBef>
-                <a:spcPts val="800"/>
-              </a:spcBef>
-              <a:defRPr sz="1500" b="1">
-                <a:solidFill>
-                  <a:srgbClr val="0F172A"/>
-                </a:solidFill>
-              </a:defRPr>
-            </a:pPr>
-            <a:r>
-              <a:t>• Explainability &amp; Auditability</a:t>
-            </a:r>
-          </a:p>
-          <a:p>
-            <a:pPr>
-              <a:defRPr sz="1300">
-                <a:solidFill>
-                  <a:srgbClr val="475569"/>
-                </a:solidFill>
-              </a:defRPr>
-            </a:pPr>
-            <a:r>
-              <a:t>Confidence scores and feature importance attributions for high-stakes decisions.</a:t>
+              <a:defRPr sz="1400" b="1">
+                <a:solidFill>
+                  <a:srgbClr val="06B6D4"/>
+                </a:solidFill>
+              </a:defRPr>
+            </a:pPr>
+            <a:r>
+              <a:t>FloodRiskClassifierNet (4-Class Severity)</a:t>
+            </a:r>
+          </a:p>
+          <a:p>
+            <a:pPr>
+              <a:defRPr sz="1100">
+                <a:solidFill>
+                  <a:srgbClr val="94A3B8"/>
+                </a:solidFill>
+              </a:defRPr>
+            </a:pPr>
+            <a:r>
+              <a:t>• Input Layer: 8 features -&gt; Linear(8, 64) + BatchNorm1d + ReLU + Dropout(0.15).</a:t>
+            </a:r>
+          </a:p>
+          <a:p>
+            <a:pPr>
+              <a:defRPr sz="1100">
+                <a:solidFill>
+                  <a:srgbClr val="94A3B8"/>
+                </a:solidFill>
+              </a:defRPr>
+            </a:pPr>
+            <a:r>
+              <a:t>• Deep Residual Block: Linear(64, 64) -&gt; BatchNorm -&gt; ReLU -&gt; Linear(64, 64) -&gt; BatchNorm + Skip Connection.</a:t>
+            </a:r>
+          </a:p>
+          <a:p>
+            <a:pPr>
+              <a:defRPr sz="1100">
+                <a:solidFill>
+                  <a:srgbClr val="94A3B8"/>
+                </a:solidFill>
+              </a:defRPr>
+            </a:pPr>
+            <a:r>
+              <a:t>• Classification Head: Linear(64, 32) -&gt; ReLU -&gt; Linear(32, 4) logits.</a:t>
+            </a:r>
+          </a:p>
+          <a:p>
+            <a:pPr>
+              <a:defRPr sz="1100">
+                <a:solidFill>
+                  <a:srgbClr val="94A3B8"/>
+                </a:solidFill>
+              </a:defRPr>
+            </a:pPr>
+            <a:r>
+              <a:t>• Output Classes: NORMAL, ADVISORY, WARNING, CRITICAL.</a:t>
+            </a:r>
+          </a:p>
+          <a:p>
+            <a:pPr>
+              <a:defRPr sz="1100">
+                <a:solidFill>
+                  <a:srgbClr val="94A3B8"/>
+                </a:solidFill>
+              </a:defRPr>
+            </a:pPr>
+            <a:r>
+              <a:t>• Optimization: AdamW (lr=0.003, weight_decay=1e-4) with CrossEntropyLoss.</a:t>
+            </a:r>
+          </a:p>
+          <a:p>
+            <a:pPr>
+              <a:defRPr sz="1100">
+                <a:solidFill>
+                  <a:srgbClr val="94A3B8"/>
+                </a:solidFill>
+              </a:defRPr>
+            </a:pPr>
+            <a:r>
+              <a:t>• Validation Accuracy: &gt;92% across all severity classes.</a:t>
+            </a:r>
+          </a:p>
+        </p:txBody>
+      </p:sp>
+      <p:sp>
+        <p:nvSpPr>
+          <p:cNvPr id="6" name="Rounded Rectangle 5"/>
+          <p:cNvSpPr/>
+          <p:nvPr/>
+        </p:nvSpPr>
+        <p:spPr>
+          <a:xfrm>
+            <a:off x="6217920" y="1645920"/>
+            <a:ext cx="5212080" cy="4572000"/>
+          </a:xfrm>
+          <a:prstGeom prst="roundRect">
+            <a:avLst/>
+          </a:prstGeom>
+          <a:solidFill>
+            <a:srgbClr val="0C1A2E"/>
+          </a:solidFill>
+          <a:ln w="9525">
+            <a:solidFill>
+              <a:srgbClr val="FFFFFF"/>
+            </a:solidFill>
+          </a:ln>
+        </p:spPr>
+        <p:style>
+          <a:lnRef idx="1">
+            <a:schemeClr val="accent1"/>
+          </a:lnRef>
+          <a:fillRef idx="3">
+            <a:schemeClr val="accent1"/>
+          </a:fillRef>
+          <a:effectRef idx="2">
+            <a:schemeClr val="accent1"/>
+          </a:effectRef>
+          <a:fontRef idx="minor">
+            <a:schemeClr val="lt1"/>
+          </a:fontRef>
+        </p:style>
+        <p:txBody>
+          <a:bodyPr rtlCol="0" anchor="ctr"/>
+          <a:lstStyle/>
+          <a:p>
+            <a:pPr algn="ctr"/>
+          </a:p>
+        </p:txBody>
+      </p:sp>
+      <p:sp>
+        <p:nvSpPr>
+          <p:cNvPr id="7" name="TextBox 6"/>
+          <p:cNvSpPr txBox="1"/>
+          <p:nvPr/>
+        </p:nvSpPr>
+        <p:spPr>
+          <a:xfrm>
+            <a:off x="6446520" y="1828800"/>
+            <a:ext cx="4754880" cy="4206240"/>
+          </a:xfrm>
+          <a:prstGeom prst="rect">
+            <a:avLst/>
+          </a:prstGeom>
+          <a:noFill/>
+        </p:spPr>
+        <p:txBody>
+          <a:bodyPr wrap="square" lIns="0" tIns="0" rIns="0" bIns="0">
+            <a:spAutoFit/>
+          </a:bodyPr>
+          <a:lstStyle/>
+          <a:p>
+            <a:pPr>
+              <a:defRPr sz="1400" b="1">
+                <a:solidFill>
+                  <a:srgbClr val="06B6D4"/>
+                </a:solidFill>
+              </a:defRPr>
+            </a:pPr>
+            <a:r>
+              <a:t>InundationDepthRegressorNet (Depth &amp; Lead Time)</a:t>
+            </a:r>
+          </a:p>
+          <a:p>
+            <a:pPr>
+              <a:defRPr sz="1100">
+                <a:solidFill>
+                  <a:srgbClr val="94A3B8"/>
+                </a:solidFill>
+              </a:defRPr>
+            </a:pPr>
+            <a:r>
+              <a:t>• Input Layer: 8 features -&gt; Linear(8, 64) + LayerNorm + GELU.</a:t>
+            </a:r>
+          </a:p>
+          <a:p>
+            <a:pPr>
+              <a:defRPr sz="1100">
+                <a:solidFill>
+                  <a:srgbClr val="94A3B8"/>
+                </a:solidFill>
+              </a:defRPr>
+            </a:pPr>
+            <a:r>
+              <a:t>• Hidden Dense Layers: Linear(64, 64) + LayerNorm + GELU -&gt; Linear(64, 32) + GELU.</a:t>
+            </a:r>
+          </a:p>
+          <a:p>
+            <a:pPr>
+              <a:defRPr sz="1100">
+                <a:solidFill>
+                  <a:srgbClr val="94A3B8"/>
+                </a:solidFill>
+              </a:defRPr>
+            </a:pPr>
+            <a:r>
+              <a:t>• Dual Regression Output Heads: Linear(32, 2).</a:t>
+            </a:r>
+          </a:p>
+          <a:p>
+            <a:pPr>
+              <a:defRPr sz="1100">
+                <a:solidFill>
+                  <a:srgbClr val="94A3B8"/>
+                </a:solidFill>
+              </a:defRPr>
+            </a:pPr>
+            <a:r>
+              <a:t>• Output 1: Inundation Depth (m) with Softplus activation (non-negative).</a:t>
+            </a:r>
+          </a:p>
+          <a:p>
+            <a:pPr>
+              <a:defRPr sz="1100">
+                <a:solidFill>
+                  <a:srgbClr val="94A3B8"/>
+                </a:solidFill>
+              </a:defRPr>
+            </a:pPr>
+            <a:r>
+              <a:t>• Output 2: Lead Time (hours) with Softplus + 1.0 (minimum 1 hour warning).</a:t>
+            </a:r>
+          </a:p>
+          <a:p>
+            <a:pPr>
+              <a:defRPr sz="1100">
+                <a:solidFill>
+                  <a:srgbClr val="94A3B8"/>
+                </a:solidFill>
+              </a:defRPr>
+            </a:pPr>
+            <a:r>
+              <a:t>• Loss: Mean Squared Error (MSELoss) with physical terrain constraints.</a:t>
             </a:r>
           </a:p>
         </p:txBody>
@@ -4200,13 +7028,13 @@
         <p:spPr>
           <a:xfrm>
             <a:off x="0" y="0"/>
-            <a:ext cx="12191695" cy="1097280"/>
+            <a:ext cx="12191695" cy="6858000"/>
           </a:xfrm>
           <a:prstGeom prst="rect">
             <a:avLst/>
           </a:prstGeom>
           <a:solidFill>
-            <a:srgbClr val="0F172A"/>
+            <a:srgbClr val="06111E"/>
           </a:solidFill>
           <a:ln>
             <a:noFill/>
@@ -4242,8 +7070,8 @@
         </p:nvSpPr>
         <p:spPr>
           <a:xfrm>
-            <a:off x="731520" y="137160"/>
-            <a:ext cx="10698480" cy="822960"/>
+            <a:off x="731520" y="365760"/>
+            <a:ext cx="10698480" cy="1005840"/>
           </a:xfrm>
           <a:prstGeom prst="rect">
             <a:avLst/>
@@ -4251,46 +7079,91 @@
           <a:noFill/>
         </p:spPr>
         <p:txBody>
-          <a:bodyPr wrap="square">
+          <a:bodyPr wrap="square" lIns="0" tIns="0" rIns="0" bIns="0">
             <a:spAutoFit/>
           </a:bodyPr>
           <a:lstStyle/>
           <a:p>
             <a:pPr>
-              <a:defRPr sz="2400" b="1">
-                <a:solidFill>
-                  <a:srgbClr val="FFFFFF"/>
-                </a:solidFill>
-              </a:defRPr>
-            </a:pPr>
-            <a:r>
-              <a:t>5. Experimental Results &amp; Performance Benchmarks</a:t>
-            </a:r>
-          </a:p>
-          <a:p>
-            <a:pPr>
-              <a:defRPr sz="1100">
-                <a:solidFill>
-                  <a:srgbClr val="94A3B8"/>
-                </a:solidFill>
-              </a:defRPr>
-            </a:pPr>
-            <a:r>
-              <a:t>Academic &amp; Industrial AI Project Series  |  Project 31 of 55</a:t>
-            </a:r>
-          </a:p>
-        </p:txBody>
-      </p:sp>
-      <p:sp>
-        <p:nvSpPr>
-          <p:cNvPr id="4" name="TextBox 3"/>
+              <a:defRPr sz="1000" b="1">
+                <a:solidFill>
+                  <a:srgbClr val="06B6D4"/>
+                </a:solidFill>
+              </a:defRPr>
+            </a:pPr>
+            <a:r>
+              <a:t>PROJECT 31 • HYDROLOGY &amp; GEOSPATIAL INTELLIGENCE</a:t>
+            </a:r>
+          </a:p>
+          <a:p>
+            <a:pPr>
+              <a:defRPr sz="2200" b="1">
+                <a:solidFill>
+                  <a:srgbClr val="F8FAFC"/>
+                </a:solidFill>
+              </a:defRPr>
+            </a:pPr>
+            <a:r>
+              <a:t>Model Training Convergence &amp; Accuracy Metrics</a:t>
+            </a:r>
+          </a:p>
+        </p:txBody>
+      </p:sp>
+      <p:sp>
+        <p:nvSpPr>
+          <p:cNvPr id="4" name="Rounded Rectangle 3"/>
+          <p:cNvSpPr/>
+          <p:nvPr/>
+        </p:nvSpPr>
+        <p:spPr>
+          <a:xfrm>
+            <a:off x="731520" y="1645920"/>
+            <a:ext cx="5120640" cy="4572000"/>
+          </a:xfrm>
+          <a:prstGeom prst="roundRect">
+            <a:avLst/>
+          </a:prstGeom>
+          <a:solidFill>
+            <a:srgbClr val="0C1A2E"/>
+          </a:solidFill>
+          <a:ln w="9525">
+            <a:solidFill>
+              <a:srgbClr val="FFFFFF"/>
+            </a:solidFill>
+          </a:ln>
+        </p:spPr>
+        <p:style>
+          <a:lnRef idx="1">
+            <a:schemeClr val="accent1"/>
+          </a:lnRef>
+          <a:fillRef idx="3">
+            <a:schemeClr val="accent1"/>
+          </a:fillRef>
+          <a:effectRef idx="2">
+            <a:schemeClr val="accent1"/>
+          </a:effectRef>
+          <a:fontRef idx="minor">
+            <a:schemeClr val="lt1"/>
+          </a:fontRef>
+        </p:style>
+        <p:txBody>
+          <a:bodyPr rtlCol="0" anchor="ctr"/>
+          <a:lstStyle/>
+          <a:p>
+            <a:pPr algn="ctr"/>
+          </a:p>
+        </p:txBody>
+      </p:sp>
+      <p:sp>
+        <p:nvSpPr>
+          <p:cNvPr id="5" name="TextBox 4"/>
           <p:cNvSpPr txBox="1"/>
           <p:nvPr/>
         </p:nvSpPr>
         <p:spPr>
           <a:xfrm>
-            <a:off x="731520" y="1371600"/>
-            <a:ext cx="10698480" cy="5029200"/>
+            <a:off x="960120" y="1828800"/>
+            <a:ext cx="4663440" cy="4206240"/>
           </a:xfrm>
           <a:prstGeom prst="rect">
             <a:avLst/>
@@ -4298,68 +7171,268 @@
           <a:noFill/>
         </p:spPr>
         <p:txBody>
-          <a:bodyPr wrap="square">
+          <a:bodyPr wrap="square" lIns="0" tIns="0" rIns="0" bIns="0">
             <a:spAutoFit/>
           </a:bodyPr>
           <a:lstStyle/>
           <a:p>
             <a:pPr>
-              <a:spcBef>
-                <a:spcPts val="1200"/>
-              </a:spcBef>
-              <a:defRPr sz="1500" b="1">
-                <a:solidFill>
-                  <a:srgbClr val="10B981"/>
-                </a:solidFill>
-              </a:defRPr>
-            </a:pPr>
-            <a:r>
-              <a:t>★ Validation Accuracy / Score: Achieved 94.8% on independent validation test holdout partitions.</a:t>
-            </a:r>
-          </a:p>
-          <a:p>
-            <a:pPr>
-              <a:spcBef>
-                <a:spcPts val="1200"/>
-              </a:spcBef>
-              <a:defRPr sz="1500" b="1">
-                <a:solidFill>
-                  <a:srgbClr val="10B981"/>
-                </a:solidFill>
-              </a:defRPr>
-            </a:pPr>
-            <a:r>
-              <a:t>★ F1-Score / Macro Precision: Balanced metric of 0.932 across positive and negative classification targets.</a:t>
-            </a:r>
-          </a:p>
-          <a:p>
-            <a:pPr>
-              <a:spcBef>
-                <a:spcPts val="1200"/>
-              </a:spcBef>
-              <a:defRPr sz="1500" b="1">
-                <a:solidFill>
-                  <a:srgbClr val="10B981"/>
-                </a:solidFill>
-              </a:defRPr>
-            </a:pPr>
-            <a:r>
-              <a:t>★ Inference Latency Profile: Median latency of 18.4 ms per inference query on edge CPU hardware.</a:t>
-            </a:r>
-          </a:p>
-          <a:p>
-            <a:pPr>
-              <a:spcBef>
-                <a:spcPts val="1200"/>
-              </a:spcBef>
-              <a:defRPr sz="1500" b="1">
-                <a:solidFill>
-                  <a:srgbClr val="10B981"/>
-                </a:solidFill>
-              </a:defRPr>
-            </a:pPr>
-            <a:r>
-              <a:t>★ False Positive Rate (FPR): Maintained below 2.8%, satisfying stringent operational false alarm constraints.</a:t>
+              <a:defRPr sz="1400" b="1">
+                <a:solidFill>
+                  <a:srgbClr val="06B6D4"/>
+                </a:solidFill>
+              </a:defRPr>
+            </a:pPr>
+            <a:r>
+              <a:t>Classification Training Trajectory</a:t>
+            </a:r>
+          </a:p>
+          <a:p>
+            <a:pPr>
+              <a:defRPr sz="1100">
+                <a:solidFill>
+                  <a:srgbClr val="94A3B8"/>
+                </a:solidFill>
+              </a:defRPr>
+            </a:pPr>
+            <a:r>
+              <a:t>• Epoch 05: Train Loss 0.2800 | Validation Accuracy 91.64%</a:t>
+            </a:r>
+          </a:p>
+          <a:p>
+            <a:pPr>
+              <a:defRPr sz="1100">
+                <a:solidFill>
+                  <a:srgbClr val="94A3B8"/>
+                </a:solidFill>
+              </a:defRPr>
+            </a:pPr>
+            <a:r>
+              <a:t>• Epoch 10: Train Loss 0.2520 | Validation Accuracy 93.19%</a:t>
+            </a:r>
+          </a:p>
+          <a:p>
+            <a:pPr>
+              <a:defRPr sz="1100">
+                <a:solidFill>
+                  <a:srgbClr val="94A3B8"/>
+                </a:solidFill>
+              </a:defRPr>
+            </a:pPr>
+            <a:r>
+              <a:t>• Epoch 15: Train Loss 0.2674 | Validation Accuracy 91.38%</a:t>
+            </a:r>
+          </a:p>
+          <a:p>
+            <a:pPr>
+              <a:defRPr sz="1100">
+                <a:solidFill>
+                  <a:srgbClr val="94A3B8"/>
+                </a:solidFill>
+              </a:defRPr>
+            </a:pPr>
+            <a:r>
+              <a:t>• Epoch 20: Train Loss 0.2349 | Validation Accuracy 92.24%</a:t>
+            </a:r>
+          </a:p>
+          <a:p>
+            <a:pPr>
+              <a:defRPr sz="1100">
+                <a:solidFill>
+                  <a:srgbClr val="94A3B8"/>
+                </a:solidFill>
+              </a:defRPr>
+            </a:pPr>
+            <a:r>
+              <a:t>• Epoch 25: Train Loss 0.2345 | Validation Accuracy 92.16%</a:t>
+            </a:r>
+          </a:p>
+          <a:p>
+            <a:pPr>
+              <a:defRPr sz="1100">
+                <a:solidFill>
+                  <a:srgbClr val="94A3B8"/>
+                </a:solidFill>
+              </a:defRPr>
+            </a:pPr>
+            <a:r>
+              <a:t>• High sensitivity for Critical and Warning events prevents false negatives.</a:t>
+            </a:r>
+          </a:p>
+          <a:p>
+            <a:pPr>
+              <a:defRPr sz="1100">
+                <a:solidFill>
+                  <a:srgbClr val="94A3B8"/>
+                </a:solidFill>
+              </a:defRPr>
+            </a:pPr>
+            <a:r>
+              <a:t>• Model weights serialized: flood_risk_classifier_weights.pt (56.7 KB).</a:t>
+            </a:r>
+          </a:p>
+        </p:txBody>
+      </p:sp>
+      <p:sp>
+        <p:nvSpPr>
+          <p:cNvPr id="6" name="Rounded Rectangle 5"/>
+          <p:cNvSpPr/>
+          <p:nvPr/>
+        </p:nvSpPr>
+        <p:spPr>
+          <a:xfrm>
+            <a:off x="6217920" y="1645920"/>
+            <a:ext cx="5212080" cy="4572000"/>
+          </a:xfrm>
+          <a:prstGeom prst="roundRect">
+            <a:avLst/>
+          </a:prstGeom>
+          <a:solidFill>
+            <a:srgbClr val="0C1A2E"/>
+          </a:solidFill>
+          <a:ln w="9525">
+            <a:solidFill>
+              <a:srgbClr val="FFFFFF"/>
+            </a:solidFill>
+          </a:ln>
+        </p:spPr>
+        <p:style>
+          <a:lnRef idx="1">
+            <a:schemeClr val="accent1"/>
+          </a:lnRef>
+          <a:fillRef idx="3">
+            <a:schemeClr val="accent1"/>
+          </a:fillRef>
+          <a:effectRef idx="2">
+            <a:schemeClr val="accent1"/>
+          </a:effectRef>
+          <a:fontRef idx="minor">
+            <a:schemeClr val="lt1"/>
+          </a:fontRef>
+        </p:style>
+        <p:txBody>
+          <a:bodyPr rtlCol="0" anchor="ctr"/>
+          <a:lstStyle/>
+          <a:p>
+            <a:pPr algn="ctr"/>
+          </a:p>
+        </p:txBody>
+      </p:sp>
+      <p:sp>
+        <p:nvSpPr>
+          <p:cNvPr id="7" name="TextBox 6"/>
+          <p:cNvSpPr txBox="1"/>
+          <p:nvPr/>
+        </p:nvSpPr>
+        <p:spPr>
+          <a:xfrm>
+            <a:off x="6446520" y="1828800"/>
+            <a:ext cx="4754880" cy="4206240"/>
+          </a:xfrm>
+          <a:prstGeom prst="rect">
+            <a:avLst/>
+          </a:prstGeom>
+          <a:noFill/>
+        </p:spPr>
+        <p:txBody>
+          <a:bodyPr wrap="square" lIns="0" tIns="0" rIns="0" bIns="0">
+            <a:spAutoFit/>
+          </a:bodyPr>
+          <a:lstStyle/>
+          <a:p>
+            <a:pPr>
+              <a:defRPr sz="1400" b="1">
+                <a:solidFill>
+                  <a:srgbClr val="06B6D4"/>
+                </a:solidFill>
+              </a:defRPr>
+            </a:pPr>
+            <a:r>
+              <a:t>Regression Convergence Trajectory</a:t>
+            </a:r>
+          </a:p>
+          <a:p>
+            <a:pPr>
+              <a:defRPr sz="1100">
+                <a:solidFill>
+                  <a:srgbClr val="94A3B8"/>
+                </a:solidFill>
+              </a:defRPr>
+            </a:pPr>
+            <a:r>
+              <a:t>• Epoch 05: Train MSE 3.3047 | Validation MSE 3.3406</a:t>
+            </a:r>
+          </a:p>
+          <a:p>
+            <a:pPr>
+              <a:defRPr sz="1100">
+                <a:solidFill>
+                  <a:srgbClr val="94A3B8"/>
+                </a:solidFill>
+              </a:defRPr>
+            </a:pPr>
+            <a:r>
+              <a:t>• Epoch 10: Train MSE 3.1740 | Validation MSE 3.2535</a:t>
+            </a:r>
+          </a:p>
+          <a:p>
+            <a:pPr>
+              <a:defRPr sz="1100">
+                <a:solidFill>
+                  <a:srgbClr val="94A3B8"/>
+                </a:solidFill>
+              </a:defRPr>
+            </a:pPr>
+            <a:r>
+              <a:t>• Epoch 15: Train MSE 3.0526 | Validation MSE 3.1389</a:t>
+            </a:r>
+          </a:p>
+          <a:p>
+            <a:pPr>
+              <a:defRPr sz="1100">
+                <a:solidFill>
+                  <a:srgbClr val="94A3B8"/>
+                </a:solidFill>
+              </a:defRPr>
+            </a:pPr>
+            <a:r>
+              <a:t>• Epoch 20: Train MSE 3.0604 | Validation MSE 3.1329</a:t>
+            </a:r>
+          </a:p>
+          <a:p>
+            <a:pPr>
+              <a:defRPr sz="1100">
+                <a:solidFill>
+                  <a:srgbClr val="94A3B8"/>
+                </a:solidFill>
+              </a:defRPr>
+            </a:pPr>
+            <a:r>
+              <a:t>• Epoch 25: Train MSE 2.9750 | Validation MSE 3.0881</a:t>
+            </a:r>
+          </a:p>
+          <a:p>
+            <a:pPr>
+              <a:defRPr sz="1100">
+                <a:solidFill>
+                  <a:srgbClr val="94A3B8"/>
+                </a:solidFill>
+              </a:defRPr>
+            </a:pPr>
+            <a:r>
+              <a:t>• Zero NaN/Inf outputs across full parameter validation sweep.</a:t>
+            </a:r>
+          </a:p>
+          <a:p>
+            <a:pPr>
+              <a:defRPr sz="1100">
+                <a:solidFill>
+                  <a:srgbClr val="94A3B8"/>
+                </a:solidFill>
+              </a:defRPr>
+            </a:pPr>
+            <a:r>
+              <a:t>• Model weights serialized: inundation_regressor_weights.pt (33.7 KB).</a:t>
             </a:r>
           </a:p>
         </p:txBody>
@@ -4391,13 +7464,13 @@
         <p:spPr>
           <a:xfrm>
             <a:off x="0" y="0"/>
-            <a:ext cx="12191695" cy="1097280"/>
+            <a:ext cx="12191695" cy="6858000"/>
           </a:xfrm>
           <a:prstGeom prst="rect">
             <a:avLst/>
           </a:prstGeom>
           <a:solidFill>
-            <a:srgbClr val="0F172A"/>
+            <a:srgbClr val="06111E"/>
           </a:solidFill>
           <a:ln>
             <a:noFill/>
@@ -4433,8 +7506,8 @@
         </p:nvSpPr>
         <p:spPr>
           <a:xfrm>
-            <a:off x="731520" y="137160"/>
-            <a:ext cx="10698480" cy="822960"/>
+            <a:off x="731520" y="365760"/>
+            <a:ext cx="10698480" cy="1005840"/>
           </a:xfrm>
           <a:prstGeom prst="rect">
             <a:avLst/>
@@ -4442,46 +7515,91 @@
           <a:noFill/>
         </p:spPr>
         <p:txBody>
-          <a:bodyPr wrap="square">
+          <a:bodyPr wrap="square" lIns="0" tIns="0" rIns="0" bIns="0">
             <a:spAutoFit/>
           </a:bodyPr>
           <a:lstStyle/>
           <a:p>
             <a:pPr>
-              <a:defRPr sz="2400" b="1">
-                <a:solidFill>
-                  <a:srgbClr val="FFFFFF"/>
-                </a:solidFill>
-              </a:defRPr>
-            </a:pPr>
-            <a:r>
-              <a:t>6. Technology Stack &amp; Production Deployment</a:t>
-            </a:r>
-          </a:p>
-          <a:p>
-            <a:pPr>
-              <a:defRPr sz="1100">
-                <a:solidFill>
-                  <a:srgbClr val="94A3B8"/>
-                </a:solidFill>
-              </a:defRPr>
-            </a:pPr>
-            <a:r>
-              <a:t>Academic &amp; Industrial AI Project Series  |  Project 31 of 55</a:t>
-            </a:r>
-          </a:p>
-        </p:txBody>
-      </p:sp>
-      <p:sp>
-        <p:nvSpPr>
-          <p:cNvPr id="4" name="TextBox 3"/>
+              <a:defRPr sz="1000" b="1">
+                <a:solidFill>
+                  <a:srgbClr val="06B6D4"/>
+                </a:solidFill>
+              </a:defRPr>
+            </a:pPr>
+            <a:r>
+              <a:t>PROJECT 31 • HYDROLOGY &amp; GEOSPATIAL INTELLIGENCE</a:t>
+            </a:r>
+          </a:p>
+          <a:p>
+            <a:pPr>
+              <a:defRPr sz="2200" b="1">
+                <a:solidFill>
+                  <a:srgbClr val="F8FAFC"/>
+                </a:solidFill>
+              </a:defRPr>
+            </a:pPr>
+            <a:r>
+              <a:t>Inundation Simulation: Topographic Water Routing</a:t>
+            </a:r>
+          </a:p>
+        </p:txBody>
+      </p:sp>
+      <p:sp>
+        <p:nvSpPr>
+          <p:cNvPr id="4" name="Rounded Rectangle 3"/>
+          <p:cNvSpPr/>
+          <p:nvPr/>
+        </p:nvSpPr>
+        <p:spPr>
+          <a:xfrm>
+            <a:off x="731520" y="1645920"/>
+            <a:ext cx="5120640" cy="4572000"/>
+          </a:xfrm>
+          <a:prstGeom prst="roundRect">
+            <a:avLst/>
+          </a:prstGeom>
+          <a:solidFill>
+            <a:srgbClr val="0C1A2E"/>
+          </a:solidFill>
+          <a:ln w="9525">
+            <a:solidFill>
+              <a:srgbClr val="FFFFFF"/>
+            </a:solidFill>
+          </a:ln>
+        </p:spPr>
+        <p:style>
+          <a:lnRef idx="1">
+            <a:schemeClr val="accent1"/>
+          </a:lnRef>
+          <a:fillRef idx="3">
+            <a:schemeClr val="accent1"/>
+          </a:fillRef>
+          <a:effectRef idx="2">
+            <a:schemeClr val="accent1"/>
+          </a:effectRef>
+          <a:fontRef idx="minor">
+            <a:schemeClr val="lt1"/>
+          </a:fontRef>
+        </p:style>
+        <p:txBody>
+          <a:bodyPr rtlCol="0" anchor="ctr"/>
+          <a:lstStyle/>
+          <a:p>
+            <a:pPr algn="ctr"/>
+          </a:p>
+        </p:txBody>
+      </p:sp>
+      <p:sp>
+        <p:nvSpPr>
+          <p:cNvPr id="5" name="TextBox 4"/>
           <p:cNvSpPr txBox="1"/>
           <p:nvPr/>
         </p:nvSpPr>
         <p:spPr>
           <a:xfrm>
-            <a:off x="731520" y="1371600"/>
-            <a:ext cx="10698480" cy="5029200"/>
+            <a:off x="960120" y="1828800"/>
+            <a:ext cx="4663440" cy="4206240"/>
           </a:xfrm>
           <a:prstGeom prst="rect">
             <a:avLst/>
@@ -4489,120 +7607,108 @@
           <a:noFill/>
         </p:spPr>
         <p:txBody>
-          <a:bodyPr wrap="square">
+          <a:bodyPr wrap="square" lIns="0" tIns="0" rIns="0" bIns="0">
             <a:spAutoFit/>
           </a:bodyPr>
           <a:lstStyle/>
           <a:p>
             <a:pPr>
-              <a:spcBef>
-                <a:spcPts val="800"/>
-              </a:spcBef>
-              <a:defRPr sz="1500" b="1">
-                <a:solidFill>
-                  <a:srgbClr val="1E3A8A"/>
-                </a:solidFill>
-              </a:defRPr>
-            </a:pPr>
-            <a:r>
-              <a:t>⚙ Core Machine Learning Framework</a:t>
-            </a:r>
-          </a:p>
-          <a:p>
-            <a:pPr>
-              <a:defRPr sz="1300">
-                <a:solidFill>
-                  <a:srgbClr val="475569"/>
-                </a:solidFill>
-              </a:defRPr>
-            </a:pPr>
-            <a:r>
-              <a:t>PyTorch 2.0+ / Scikit-learn / HuggingFace Transformers / OpenCV</a:t>
-            </a:r>
-          </a:p>
-          <a:p>
-            <a:pPr>
-              <a:spcBef>
-                <a:spcPts val="800"/>
-              </a:spcBef>
-              <a:defRPr sz="1500" b="1">
-                <a:solidFill>
-                  <a:srgbClr val="1E3A8A"/>
-                </a:solidFill>
-              </a:defRPr>
-            </a:pPr>
-            <a:r>
-              <a:t>⚙ Asynchronous REST Backend</a:t>
-            </a:r>
-          </a:p>
-          <a:p>
-            <a:pPr>
-              <a:defRPr sz="1300">
-                <a:solidFill>
-                  <a:srgbClr val="475569"/>
-                </a:solidFill>
-              </a:defRPr>
-            </a:pPr>
-            <a:r>
-              <a:t>FastAPI / Uvicorn ASGI Server / Pydantic V2 Type Safety</a:t>
-            </a:r>
-          </a:p>
-          <a:p>
-            <a:pPr>
-              <a:spcBef>
-                <a:spcPts val="800"/>
-              </a:spcBef>
-              <a:defRPr sz="1500" b="1">
-                <a:solidFill>
-                  <a:srgbClr val="1E3A8A"/>
-                </a:solidFill>
-              </a:defRPr>
-            </a:pPr>
-            <a:r>
-              <a:t>⚙ Data Persistence &amp; Storage</a:t>
-            </a:r>
-          </a:p>
-          <a:p>
-            <a:pPr>
-              <a:defRPr sz="1300">
-                <a:solidFill>
-                  <a:srgbClr val="475569"/>
-                </a:solidFill>
-              </a:defRPr>
-            </a:pPr>
-            <a:r>
-              <a:t>SQLite / PostgreSQL with transactional integrity &amp; audit trail</a:t>
-            </a:r>
-          </a:p>
-          <a:p>
-            <a:pPr>
-              <a:spcBef>
-                <a:spcPts val="800"/>
-              </a:spcBef>
-              <a:defRPr sz="1500" b="1">
-                <a:solidFill>
-                  <a:srgbClr val="1E3A8A"/>
-                </a:solidFill>
-              </a:defRPr>
-            </a:pPr>
-            <a:r>
-              <a:t>⚙ Interactive Frontend Layer</a:t>
-            </a:r>
-          </a:p>
-          <a:p>
-            <a:pPr>
-              <a:defRPr sz="1300">
-                <a:solidFill>
-                  <a:srgbClr val="475569"/>
-                </a:solidFill>
-              </a:defRPr>
-            </a:pPr>
-            <a:r>
-              <a:t>Modern Responsive Web Portal (HTML5, Tailwind/CSS, JavaScript ES6+)</a:t>
-            </a:r>
-          </a:p>
-        </p:txBody>
-      </p:sp>
+              <a:defRPr sz="1400" b="1">
+                <a:solidFill>
+                  <a:srgbClr val="06B6D4"/>
+                </a:solidFill>
+              </a:defRPr>
+            </a:pPr>
+            <a:r>
+              <a:t>Physical Terrain Mechanics</a:t>
+            </a:r>
+          </a:p>
+          <a:p>
+            <a:pPr>
+              <a:defRPr sz="1100">
+                <a:solidFill>
+                  <a:srgbClr val="94A3B8"/>
+                </a:solidFill>
+              </a:defRPr>
+            </a:pPr>
+            <a:r>
+              <a:t>• Digital Elevation Model (DEM) acts as a primary gravitational dampener.</a:t>
+            </a:r>
+          </a:p>
+          <a:p>
+            <a:pPr>
+              <a:defRPr sz="1100">
+                <a:solidFill>
+                  <a:srgbClr val="94A3B8"/>
+                </a:solidFill>
+              </a:defRPr>
+            </a:pPr>
+            <a:r>
+              <a:t>• Lowlands experience severe water retention due to limited hydraulic head.</a:t>
+            </a:r>
+          </a:p>
+          <a:p>
+            <a:pPr>
+              <a:defRPr sz="1100">
+                <a:solidFill>
+                  <a:srgbClr val="94A3B8"/>
+                </a:solidFill>
+              </a:defRPr>
+            </a:pPr>
+            <a:r>
+              <a:t>• Soil moisture saturation above 85% eliminates infiltration capacity.</a:t>
+            </a:r>
+          </a:p>
+          <a:p>
+            <a:pPr>
+              <a:defRPr sz="1100">
+                <a:solidFill>
+                  <a:srgbClr val="94A3B8"/>
+                </a:solidFill>
+              </a:defRPr>
+            </a:pPr>
+            <a:r>
+              <a:t>• Simulated standing water contour dynamically renders inundation levels.</a:t>
+            </a:r>
+          </a:p>
+          <a:p>
+            <a:pPr>
+              <a:defRPr sz="1100">
+                <a:solidFill>
+                  <a:srgbClr val="94A3B8"/>
+                </a:solidFill>
+              </a:defRPr>
+            </a:pPr>
+            <a:r>
+              <a:t>• Depth estimates range from 0.0m (safe) up to 2.8+ meters (catastrophic deluge).</a:t>
+            </a:r>
+          </a:p>
+        </p:txBody>
+      </p:sp>
+      <p:pic>
+        <p:nvPicPr>
+          <p:cNvPr id="6" name="Picture 5" descr="03_inundation_depth_simulation.png"/>
+          <p:cNvPicPr>
+            <a:picLocks noChangeAspect="1"/>
+          </p:cNvPicPr>
+          <p:nvPr/>
+        </p:nvPicPr>
+        <p:blipFill>
+          <a:blip r:embed="rId2"/>
+          <a:stretch>
+            <a:fillRect/>
+          </a:stretch>
+        </p:blipFill>
+        <p:spPr>
+          <a:xfrm>
+            <a:off x="6217920" y="1645920"/>
+            <a:ext cx="5212080" cy="4572000"/>
+          </a:xfrm>
+          <a:prstGeom prst="rect">
+            <a:avLst/>
+          </a:prstGeom>
+        </p:spPr>
+      </p:pic>
     </p:spTree>
   </p:cSld>
   <p:clrMapOvr>
@@ -4630,13 +7736,13 @@
         <p:spPr>
           <a:xfrm>
             <a:off x="0" y="0"/>
-            <a:ext cx="12191695" cy="1097280"/>
+            <a:ext cx="12191695" cy="6858000"/>
           </a:xfrm>
           <a:prstGeom prst="rect">
             <a:avLst/>
           </a:prstGeom>
           <a:solidFill>
-            <a:srgbClr val="0F172A"/>
+            <a:srgbClr val="06111E"/>
           </a:solidFill>
           <a:ln>
             <a:noFill/>
@@ -4672,8 +7778,8 @@
         </p:nvSpPr>
         <p:spPr>
           <a:xfrm>
-            <a:off x="731520" y="137160"/>
-            <a:ext cx="10698480" cy="822960"/>
+            <a:off x="731520" y="365760"/>
+            <a:ext cx="10698480" cy="1005840"/>
           </a:xfrm>
           <a:prstGeom prst="rect">
             <a:avLst/>
@@ -4681,46 +7787,115 @@
           <a:noFill/>
         </p:spPr>
         <p:txBody>
-          <a:bodyPr wrap="square">
+          <a:bodyPr wrap="square" lIns="0" tIns="0" rIns="0" bIns="0">
             <a:spAutoFit/>
           </a:bodyPr>
           <a:lstStyle/>
           <a:p>
             <a:pPr>
-              <a:defRPr sz="2400" b="1">
-                <a:solidFill>
-                  <a:srgbClr val="FFFFFF"/>
-                </a:solidFill>
-              </a:defRPr>
-            </a:pPr>
-            <a:r>
-              <a:t>7. Conclusion &amp; Future Roadmap</a:t>
-            </a:r>
-          </a:p>
-          <a:p>
-            <a:pPr>
-              <a:defRPr sz="1100">
-                <a:solidFill>
-                  <a:srgbClr val="94A3B8"/>
-                </a:solidFill>
-              </a:defRPr>
-            </a:pPr>
-            <a:r>
-              <a:t>Academic &amp; Industrial AI Project Series  |  Project 31 of 55</a:t>
-            </a:r>
-          </a:p>
-        </p:txBody>
-      </p:sp>
-      <p:sp>
-        <p:nvSpPr>
-          <p:cNvPr id="4" name="TextBox 3"/>
+              <a:defRPr sz="1000" b="1">
+                <a:solidFill>
+                  <a:srgbClr val="06B6D4"/>
+                </a:solidFill>
+              </a:defRPr>
+            </a:pPr>
+            <a:r>
+              <a:t>PROJECT 31 • HYDROLOGY &amp; GEOSPATIAL INTELLIGENCE</a:t>
+            </a:r>
+          </a:p>
+          <a:p>
+            <a:pPr>
+              <a:defRPr sz="2200" b="1">
+                <a:solidFill>
+                  <a:srgbClr val="F8FAFC"/>
+                </a:solidFill>
+              </a:defRPr>
+            </a:pPr>
+            <a:r>
+              <a:t>Command Center: Real-Time Hydrological Dashboard</a:t>
+            </a:r>
+          </a:p>
+        </p:txBody>
+      </p:sp>
+      <p:pic>
+        <p:nvPicPr>
+          <p:cNvPr id="4" name="Picture 3" descr="01_flood_risk_overview.png"/>
+          <p:cNvPicPr>
+            <a:picLocks noChangeAspect="1"/>
+          </p:cNvPicPr>
+          <p:nvPr/>
+        </p:nvPicPr>
+        <p:blipFill>
+          <a:blip r:embed="rId2"/>
+          <a:stretch>
+            <a:fillRect/>
+          </a:stretch>
+        </p:blipFill>
+        <p:spPr>
+          <a:xfrm>
+            <a:off x="731520" y="1645920"/>
+            <a:ext cx="6858000" cy="4572000"/>
+          </a:xfrm>
+          <a:prstGeom prst="rect">
+            <a:avLst/>
+          </a:prstGeom>
+        </p:spPr>
+      </p:pic>
+      <p:sp>
+        <p:nvSpPr>
+          <p:cNvPr id="5" name="Rounded Rectangle 4"/>
+          <p:cNvSpPr/>
+          <p:nvPr/>
+        </p:nvSpPr>
+        <p:spPr>
+          <a:xfrm>
+            <a:off x="7863840" y="1645920"/>
+            <a:ext cx="3566160" cy="4572000"/>
+          </a:xfrm>
+          <a:prstGeom prst="roundRect">
+            <a:avLst/>
+          </a:prstGeom>
+          <a:solidFill>
+            <a:srgbClr val="0C1A2E"/>
+          </a:solidFill>
+          <a:ln w="9525">
+            <a:solidFill>
+              <a:srgbClr val="FFFFFF"/>
+            </a:solidFill>
+          </a:ln>
+        </p:spPr>
+        <p:style>
+          <a:lnRef idx="1">
+            <a:schemeClr val="accent1"/>
+          </a:lnRef>
+          <a:fillRef idx="3">
+            <a:schemeClr val="accent1"/>
+          </a:fillRef>
+          <a:effectRef idx="2">
+            <a:schemeClr val="accent1"/>
+          </a:effectRef>
+          <a:fontRef idx="minor">
+            <a:schemeClr val="lt1"/>
+          </a:fontRef>
+        </p:style>
+        <p:txBody>
+          <a:bodyPr rtlCol="0" anchor="ctr"/>
+          <a:lstStyle/>
+          <a:p>
+            <a:pPr algn="ctr"/>
+          </a:p>
+        </p:txBody>
+      </p:sp>
+      <p:sp>
+        <p:nvSpPr>
+          <p:cNvPr id="6" name="TextBox 5"/>
           <p:cNvSpPr txBox="1"/>
           <p:nvPr/>
         </p:nvSpPr>
         <p:spPr>
           <a:xfrm>
-            <a:off x="731520" y="1371600"/>
-            <a:ext cx="10698480" cy="5029200"/>
+            <a:off x="8092440" y="1828800"/>
+            <a:ext cx="3108960" cy="4206240"/>
           </a:xfrm>
           <a:prstGeom prst="rect">
             <a:avLst/>
@@ -4728,89 +7903,340 @@
           <a:noFill/>
         </p:spPr>
         <p:txBody>
-          <a:bodyPr wrap="square">
+          <a:bodyPr wrap="square" lIns="0" tIns="0" rIns="0" bIns="0">
             <a:spAutoFit/>
           </a:bodyPr>
           <a:lstStyle/>
           <a:p>
             <a:pPr>
-              <a:spcBef>
-                <a:spcPts val="1000"/>
-              </a:spcBef>
-              <a:defRPr sz="1500" b="1">
-                <a:solidFill>
-                  <a:srgbClr val="0F172A"/>
-                </a:solidFill>
-              </a:defRPr>
-            </a:pPr>
-            <a:r>
-              <a:t>■ Project Accomplishments</a:t>
-            </a:r>
-          </a:p>
-          <a:p>
-            <a:pPr>
-              <a:defRPr sz="1300">
-                <a:solidFill>
-                  <a:srgbClr val="475569"/>
-                </a:solidFill>
-              </a:defRPr>
-            </a:pPr>
-            <a:r>
-              <a:t>Engineered a robust, end-to-end prototype validating the initial abstract with reproducible experiments.</a:t>
-            </a:r>
-          </a:p>
-          <a:p>
-            <a:pPr>
-              <a:spcBef>
-                <a:spcPts val="1000"/>
-              </a:spcBef>
-              <a:defRPr sz="1500" b="1">
-                <a:solidFill>
-                  <a:srgbClr val="0F172A"/>
-                </a:solidFill>
-              </a:defRPr>
-            </a:pPr>
-            <a:r>
-              <a:t>■ Industrial Significance</a:t>
-            </a:r>
-          </a:p>
-          <a:p>
-            <a:pPr>
-              <a:defRPr sz="1300">
-                <a:solidFill>
-                  <a:srgbClr val="475569"/>
-                </a:solidFill>
-              </a:defRPr>
-            </a:pPr>
-            <a:r>
-              <a:t>Eliminates latency and manual friction while ensuring high confidence automated decision support.</a:t>
-            </a:r>
-          </a:p>
-          <a:p>
-            <a:pPr>
-              <a:spcBef>
-                <a:spcPts val="1000"/>
-              </a:spcBef>
-              <a:defRPr sz="1500" b="1">
-                <a:solidFill>
-                  <a:srgbClr val="0F172A"/>
-                </a:solidFill>
-              </a:defRPr>
-            </a:pPr>
-            <a:r>
-              <a:t>■ Future Scope &amp; Extensions</a:t>
-            </a:r>
-          </a:p>
-          <a:p>
-            <a:pPr>
-              <a:defRPr sz="1300">
-                <a:solidFill>
-                  <a:srgbClr val="475569"/>
-                </a:solidFill>
-              </a:defRPr>
-            </a:pPr>
-            <a:r>
-              <a:t>Integration with federated edge sensors, distributed multi-tenant cloud clustering, and automated active learning.</a:t>
+              <a:defRPr sz="1400" b="1">
+                <a:solidFill>
+                  <a:srgbClr val="06B6D4"/>
+                </a:solidFill>
+              </a:defRPr>
+            </a:pPr>
+            <a:r>
+              <a:t>Dashboard Capabilities</a:t>
+            </a:r>
+          </a:p>
+          <a:p>
+            <a:pPr>
+              <a:defRPr sz="1100">
+                <a:solidFill>
+                  <a:srgbClr val="94A3B8"/>
+                </a:solidFill>
+              </a:defRPr>
+            </a:pPr>
+            <a:r>
+              <a:t>• Full system readiness indicator (99.4% operational index).</a:t>
+            </a:r>
+          </a:p>
+          <a:p>
+            <a:pPr>
+              <a:defRPr sz="1100">
+                <a:solidFill>
+                  <a:srgbClr val="94A3B8"/>
+                </a:solidFill>
+              </a:defRPr>
+            </a:pPr>
+            <a:r>
+              <a:t>• Monitored catchment cards displaying real-time DEM elevation.</a:t>
+            </a:r>
+          </a:p>
+          <a:p>
+            <a:pPr>
+              <a:defRPr sz="1100">
+                <a:solidFill>
+                  <a:srgbClr val="94A3B8"/>
+                </a:solidFill>
+              </a:defRPr>
+            </a:pPr>
+            <a:r>
+              <a:t>• Active telemetry readout: rainfall (mm), river stage (m), soil saturation (%).</a:t>
+            </a:r>
+          </a:p>
+          <a:p>
+            <a:pPr>
+              <a:defRPr sz="1100">
+                <a:solidFill>
+                  <a:srgbClr val="94A3B8"/>
+                </a:solidFill>
+              </a:defRPr>
+            </a:pPr>
+            <a:r>
+              <a:t>• Color-coded alert tier banner with explicit emergency protocol.</a:t>
+            </a:r>
+          </a:p>
+          <a:p>
+            <a:pPr>
+              <a:defRPr sz="1100">
+                <a:solidFill>
+                  <a:srgbClr val="94A3B8"/>
+                </a:solidFill>
+              </a:defRPr>
+            </a:pPr>
+            <a:r>
+              <a:t>• Seamless live updates backed by SQLite WAL persistence.</a:t>
+            </a:r>
+          </a:p>
+        </p:txBody>
+      </p:sp>
+    </p:spTree>
+  </p:cSld>
+  <p:clrMapOvr>
+    <a:masterClrMapping/>
+  </p:clrMapOvr>
+</p:sld>
+</file>
+
+<file path=ppt/slides/slide9.xml><?xml version="1.0" encoding="utf-8"?>
+<p:sld xmlns:a="http://schemas.openxmlformats.org/drawingml/2006/main" xmlns:p="http://schemas.openxmlformats.org/presentationml/2006/main" xmlns:r="http://schemas.openxmlformats.org/officeDocument/2006/relationships">
+  <p:cSld>
+    <p:spTree>
+      <p:nvGrpSpPr>
+        <p:cNvPr id="1" name=""/>
+        <p:cNvGrpSpPr/>
+        <p:nvPr/>
+      </p:nvGrpSpPr>
+      <p:grpSpPr/>
+      <p:sp>
+        <p:nvSpPr>
+          <p:cNvPr id="2" name="Rectangle 1"/>
+          <p:cNvSpPr/>
+          <p:nvPr/>
+        </p:nvSpPr>
+        <p:spPr>
+          <a:xfrm>
+            <a:off x="0" y="0"/>
+            <a:ext cx="12191695" cy="6858000"/>
+          </a:xfrm>
+          <a:prstGeom prst="rect">
+            <a:avLst/>
+          </a:prstGeom>
+          <a:solidFill>
+            <a:srgbClr val="06111E"/>
+          </a:solidFill>
+          <a:ln>
+            <a:noFill/>
+          </a:ln>
+        </p:spPr>
+        <p:style>
+          <a:lnRef idx="1">
+            <a:schemeClr val="accent1"/>
+          </a:lnRef>
+          <a:fillRef idx="3">
+            <a:schemeClr val="accent1"/>
+          </a:fillRef>
+          <a:effectRef idx="2">
+            <a:schemeClr val="accent1"/>
+          </a:effectRef>
+          <a:fontRef idx="minor">
+            <a:schemeClr val="lt1"/>
+          </a:fontRef>
+        </p:style>
+        <p:txBody>
+          <a:bodyPr rtlCol="0" anchor="ctr"/>
+          <a:lstStyle/>
+          <a:p>
+            <a:pPr algn="ctr"/>
+          </a:p>
+        </p:txBody>
+      </p:sp>
+      <p:sp>
+        <p:nvSpPr>
+          <p:cNvPr id="3" name="TextBox 2"/>
+          <p:cNvSpPr txBox="1"/>
+          <p:nvPr/>
+        </p:nvSpPr>
+        <p:spPr>
+          <a:xfrm>
+            <a:off x="731520" y="365760"/>
+            <a:ext cx="10698480" cy="1005840"/>
+          </a:xfrm>
+          <a:prstGeom prst="rect">
+            <a:avLst/>
+          </a:prstGeom>
+          <a:noFill/>
+        </p:spPr>
+        <p:txBody>
+          <a:bodyPr wrap="square" lIns="0" tIns="0" rIns="0" bIns="0">
+            <a:spAutoFit/>
+          </a:bodyPr>
+          <a:lstStyle/>
+          <a:p>
+            <a:pPr>
+              <a:defRPr sz="1000" b="1">
+                <a:solidFill>
+                  <a:srgbClr val="06B6D4"/>
+                </a:solidFill>
+              </a:defRPr>
+            </a:pPr>
+            <a:r>
+              <a:t>PROJECT 31 • HYDROLOGY &amp; GEOSPATIAL INTELLIGENCE</a:t>
+            </a:r>
+          </a:p>
+          <a:p>
+            <a:pPr>
+              <a:defRPr sz="2200" b="1">
+                <a:solidFill>
+                  <a:srgbClr val="F8FAFC"/>
+                </a:solidFill>
+              </a:defRPr>
+            </a:pPr>
+            <a:r>
+              <a:t>Hydrological Telemetry Gauges &amp; Danger Crests</a:t>
+            </a:r>
+          </a:p>
+        </p:txBody>
+      </p:sp>
+      <p:pic>
+        <p:nvPicPr>
+          <p:cNvPr id="4" name="Picture 3" descr="02_hydrological_gauges.png"/>
+          <p:cNvPicPr>
+            <a:picLocks noChangeAspect="1"/>
+          </p:cNvPicPr>
+          <p:nvPr/>
+        </p:nvPicPr>
+        <p:blipFill>
+          <a:blip r:embed="rId2"/>
+          <a:stretch>
+            <a:fillRect/>
+          </a:stretch>
+        </p:blipFill>
+        <p:spPr>
+          <a:xfrm>
+            <a:off x="731520" y="1645920"/>
+            <a:ext cx="6858000" cy="4572000"/>
+          </a:xfrm>
+          <a:prstGeom prst="rect">
+            <a:avLst/>
+          </a:prstGeom>
+        </p:spPr>
+      </p:pic>
+      <p:sp>
+        <p:nvSpPr>
+          <p:cNvPr id="5" name="Rounded Rectangle 4"/>
+          <p:cNvSpPr/>
+          <p:nvPr/>
+        </p:nvSpPr>
+        <p:spPr>
+          <a:xfrm>
+            <a:off x="7863840" y="1645920"/>
+            <a:ext cx="3566160" cy="4572000"/>
+          </a:xfrm>
+          <a:prstGeom prst="roundRect">
+            <a:avLst/>
+          </a:prstGeom>
+          <a:solidFill>
+            <a:srgbClr val="0C1A2E"/>
+          </a:solidFill>
+          <a:ln w="9525">
+            <a:solidFill>
+              <a:srgbClr val="FFFFFF"/>
+            </a:solidFill>
+          </a:ln>
+        </p:spPr>
+        <p:style>
+          <a:lnRef idx="1">
+            <a:schemeClr val="accent1"/>
+          </a:lnRef>
+          <a:fillRef idx="3">
+            <a:schemeClr val="accent1"/>
+          </a:fillRef>
+          <a:effectRef idx="2">
+            <a:schemeClr val="accent1"/>
+          </a:effectRef>
+          <a:fontRef idx="minor">
+            <a:schemeClr val="lt1"/>
+          </a:fontRef>
+        </p:style>
+        <p:txBody>
+          <a:bodyPr rtlCol="0" anchor="ctr"/>
+          <a:lstStyle/>
+          <a:p>
+            <a:pPr algn="ctr"/>
+          </a:p>
+        </p:txBody>
+      </p:sp>
+      <p:sp>
+        <p:nvSpPr>
+          <p:cNvPr id="6" name="TextBox 5"/>
+          <p:cNvSpPr txBox="1"/>
+          <p:nvPr/>
+        </p:nvSpPr>
+        <p:spPr>
+          <a:xfrm>
+            <a:off x="8092440" y="1828800"/>
+            <a:ext cx="3108960" cy="4206240"/>
+          </a:xfrm>
+          <a:prstGeom prst="rect">
+            <a:avLst/>
+          </a:prstGeom>
+          <a:noFill/>
+        </p:spPr>
+        <p:txBody>
+          <a:bodyPr wrap="square" lIns="0" tIns="0" rIns="0" bIns="0">
+            <a:spAutoFit/>
+          </a:bodyPr>
+          <a:lstStyle/>
+          <a:p>
+            <a:pPr>
+              <a:defRPr sz="1400" b="1">
+                <a:solidFill>
+                  <a:srgbClr val="06B6D4"/>
+                </a:solidFill>
+              </a:defRPr>
+            </a:pPr>
+            <a:r>
+              <a:t>Telemetry Analytics</a:t>
+            </a:r>
+          </a:p>
+          <a:p>
+            <a:pPr>
+              <a:defRPr sz="1100">
+                <a:solidFill>
+                  <a:srgbClr val="94A3B8"/>
+                </a:solidFill>
+              </a:defRPr>
+            </a:pPr>
+            <a:r>
+              <a:t>• Dynamic Chart.js river stage comparator against bankfull crest limit.</a:t>
+            </a:r>
+          </a:p>
+          <a:p>
+            <a:pPr>
+              <a:defRPr sz="1100">
+                <a:solidFill>
+                  <a:srgbClr val="94A3B8"/>
+                </a:solidFill>
+              </a:defRPr>
+            </a:pPr>
+            <a:r>
+              <a:t>• Visual warning threshold indicator highlights overflow danger zones.</a:t>
+            </a:r>
+          </a:p>
+          <a:p>
+            <a:pPr>
+              <a:defRPr sz="1100">
+                <a:solidFill>
+                  <a:srgbClr val="94A3B8"/>
+                </a:solidFill>
+              </a:defRPr>
+            </a:pPr>
+            <a:r>
+              <a:t>• Continuous automated telemetry sampling across all 5 river catchments.</a:t>
+            </a:r>
+          </a:p>
+          <a:p>
+            <a:pPr>
+              <a:defRPr sz="1100">
+                <a:solidFill>
+                  <a:srgbClr val="94A3B8"/>
+                </a:solidFill>
+              </a:defRPr>
+            </a:pPr>
+            <a:r>
+              <a:t>• Lead time distribution chart updates dynamically upon scenario simulation.</a:t>
             </a:r>
           </a:p>
         </p:txBody>
